--- a/scuola2026.pptx
+++ b/scuola2026.pptx
@@ -5,16 +5,19 @@
     <p:sldMasterId id="2147483648" r:id="rId1"/>
   </p:sldMasterIdLst>
   <p:notesMasterIdLst>
-    <p:notesMasterId r:id="rId9"/>
+    <p:notesMasterId r:id="rId12"/>
   </p:notesMasterIdLst>
   <p:sldIdLst>
-    <p:sldId id="257" r:id="rId2"/>
-    <p:sldId id="258" r:id="rId3"/>
-    <p:sldId id="259" r:id="rId4"/>
-    <p:sldId id="260" r:id="rId5"/>
-    <p:sldId id="269" r:id="rId6"/>
-    <p:sldId id="262" r:id="rId7"/>
-    <p:sldId id="268" r:id="rId8"/>
+    <p:sldId id="271" r:id="rId2"/>
+    <p:sldId id="257" r:id="rId3"/>
+    <p:sldId id="258" r:id="rId4"/>
+    <p:sldId id="259" r:id="rId5"/>
+    <p:sldId id="260" r:id="rId6"/>
+    <p:sldId id="269" r:id="rId7"/>
+    <p:sldId id="262" r:id="rId8"/>
+    <p:sldId id="268" r:id="rId9"/>
+    <p:sldId id="273" r:id="rId10"/>
+    <p:sldId id="274" r:id="rId11"/>
   </p:sldIdLst>
   <p:sldSz cx="12192000" cy="6858000"/>
   <p:notesSz cx="6858000" cy="9144000"/>
@@ -203,7 +206,7 @@
           <a:p>
             <a:fld id="{FD99C88B-43CB-465C-AC07-4A1603544EEF}" type="datetimeFigureOut">
               <a:rPr lang="it-IT" smtClean="0"/>
-              <a:t>11/10/2026</a:t>
+              <a:t>22/10/2026</a:t>
             </a:fld>
             <a:endParaRPr lang="it-IT"/>
           </a:p>
@@ -617,7 +620,7 @@
           <a:p>
             <a:fld id="{0EC8B29D-1AA2-4955-B4ED-3C2E8AB5E7B7}" type="datetime1">
               <a:rPr lang="it-IT" smtClean="0"/>
-              <a:t>11/10/2026</a:t>
+              <a:t>22/10/2026</a:t>
             </a:fld>
             <a:endParaRPr lang="it-IT"/>
           </a:p>
@@ -815,7 +818,7 @@
           <a:p>
             <a:fld id="{1CCCACE1-107B-4423-92E6-9CBAEDFF39D7}" type="datetime1">
               <a:rPr lang="it-IT" smtClean="0"/>
-              <a:t>11/10/2026</a:t>
+              <a:t>22/10/2026</a:t>
             </a:fld>
             <a:endParaRPr lang="it-IT"/>
           </a:p>
@@ -1023,7 +1026,7 @@
           <a:p>
             <a:fld id="{75510862-D03A-40AF-9459-483BB5FF88A0}" type="datetime1">
               <a:rPr lang="it-IT" smtClean="0"/>
-              <a:t>11/10/2026</a:t>
+              <a:t>22/10/2026</a:t>
             </a:fld>
             <a:endParaRPr lang="it-IT"/>
           </a:p>
@@ -1221,7 +1224,7 @@
           <a:p>
             <a:fld id="{B98E00E7-A727-43FD-805E-9224E6BDAC3D}" type="datetime1">
               <a:rPr lang="it-IT" smtClean="0"/>
-              <a:t>11/10/2026</a:t>
+              <a:t>22/10/2026</a:t>
             </a:fld>
             <a:endParaRPr lang="it-IT"/>
           </a:p>
@@ -1496,7 +1499,7 @@
           <a:p>
             <a:fld id="{514C4067-742A-42A1-8FF7-649EBE7507D9}" type="datetime1">
               <a:rPr lang="it-IT" smtClean="0"/>
-              <a:t>11/10/2026</a:t>
+              <a:t>22/10/2026</a:t>
             </a:fld>
             <a:endParaRPr lang="it-IT"/>
           </a:p>
@@ -1761,7 +1764,7 @@
           <a:p>
             <a:fld id="{3F7F8174-8BD3-4C8F-B89C-BBC56B3549A3}" type="datetime1">
               <a:rPr lang="it-IT" smtClean="0"/>
-              <a:t>11/10/2026</a:t>
+              <a:t>22/10/2026</a:t>
             </a:fld>
             <a:endParaRPr lang="it-IT"/>
           </a:p>
@@ -2173,7 +2176,7 @@
           <a:p>
             <a:fld id="{C692EF37-6EB9-49E1-90A9-32373D7F613F}" type="datetime1">
               <a:rPr lang="it-IT" smtClean="0"/>
-              <a:t>11/10/2026</a:t>
+              <a:t>22/10/2026</a:t>
             </a:fld>
             <a:endParaRPr lang="it-IT"/>
           </a:p>
@@ -2314,7 +2317,7 @@
           <a:p>
             <a:fld id="{A47C857E-7037-42F5-A0E6-F1969B575D7B}" type="datetime1">
               <a:rPr lang="it-IT" smtClean="0"/>
-              <a:t>11/10/2026</a:t>
+              <a:t>22/10/2026</a:t>
             </a:fld>
             <a:endParaRPr lang="it-IT"/>
           </a:p>
@@ -2427,7 +2430,7 @@
           <a:p>
             <a:fld id="{B52F5AFB-FDAE-4C9F-B46D-E5D396222373}" type="datetime1">
               <a:rPr lang="it-IT" smtClean="0"/>
-              <a:t>11/10/2026</a:t>
+              <a:t>22/10/2026</a:t>
             </a:fld>
             <a:endParaRPr lang="it-IT"/>
           </a:p>
@@ -2738,7 +2741,7 @@
           <a:p>
             <a:fld id="{910E922E-C5D3-4048-ACF7-E68149FEBE18}" type="datetime1">
               <a:rPr lang="it-IT" smtClean="0"/>
-              <a:t>11/10/2026</a:t>
+              <a:t>22/10/2026</a:t>
             </a:fld>
             <a:endParaRPr lang="it-IT"/>
           </a:p>
@@ -3026,7 +3029,7 @@
           <a:p>
             <a:fld id="{FF9285D8-E0DE-4CB7-82BB-0755DF6B59D1}" type="datetime1">
               <a:rPr lang="it-IT" smtClean="0"/>
-              <a:t>11/10/2026</a:t>
+              <a:t>22/10/2026</a:t>
             </a:fld>
             <a:endParaRPr lang="it-IT"/>
           </a:p>
@@ -3267,7 +3270,7 @@
           <a:p>
             <a:fld id="{07C2A574-841A-40BA-ACD5-BD495618AB66}" type="datetime1">
               <a:rPr lang="it-IT" smtClean="0"/>
-              <a:t>11/10/2026</a:t>
+              <a:t>22/10/2026</a:t>
             </a:fld>
             <a:endParaRPr lang="it-IT"/>
           </a:p>
@@ -3687,6 +3690,289 @@
       </p:grpSpPr>
       <p:sp>
         <p:nvSpPr>
+          <p:cNvPr id="2" name="Titolo 1">
+            <a:extLst>
+              <a:ext uri="{FF2B5EF4-FFF2-40B4-BE49-F238E27FC236}">
+                <a16:creationId xmlns:a16="http://schemas.microsoft.com/office/drawing/2014/main" id="{3BE448D8-163A-BF0F-F91D-BC787F4C9294}"/>
+              </a:ext>
+            </a:extLst>
+          </p:cNvPr>
+          <p:cNvSpPr>
+            <a:spLocks noGrp="1"/>
+          </p:cNvSpPr>
+          <p:nvPr>
+            <p:ph type="ctrTitle"/>
+          </p:nvPr>
+        </p:nvSpPr>
+        <p:spPr/>
+        <p:txBody>
+          <a:bodyPr>
+            <a:normAutofit fontScale="90000"/>
+          </a:bodyPr>
+          <a:lstStyle/>
+          <a:p>
+            <a:r>
+              <a:rPr lang="en-US" dirty="0" err="1"/>
+              <a:t>Scuola</a:t>
+            </a:r>
+            <a:r>
+              <a:rPr lang="en-US" dirty="0"/>
+              <a:t> “Python, Deep Learning and Computer Vision”</a:t>
+            </a:r>
+            <a:endParaRPr lang="it-IT" dirty="0"/>
+          </a:p>
+        </p:txBody>
+      </p:sp>
+      <p:sp>
+        <p:nvSpPr>
+          <p:cNvPr id="3" name="Sottotitolo 2">
+            <a:extLst>
+              <a:ext uri="{FF2B5EF4-FFF2-40B4-BE49-F238E27FC236}">
+                <a16:creationId xmlns:a16="http://schemas.microsoft.com/office/drawing/2014/main" id="{CF90DB6C-D5C5-3CF9-A680-F0C9347B63A1}"/>
+              </a:ext>
+            </a:extLst>
+          </p:cNvPr>
+          <p:cNvSpPr>
+            <a:spLocks noGrp="1"/>
+          </p:cNvSpPr>
+          <p:nvPr>
+            <p:ph type="subTitle" idx="1"/>
+          </p:nvPr>
+        </p:nvSpPr>
+        <p:spPr/>
+        <p:txBody>
+          <a:bodyPr/>
+          <a:lstStyle/>
+          <a:p>
+            <a:r>
+              <a:rPr lang="it-IT" dirty="0"/>
+              <a:t>Ed. 2026</a:t>
+            </a:r>
+          </a:p>
+        </p:txBody>
+      </p:sp>
+      <p:sp>
+        <p:nvSpPr>
+          <p:cNvPr id="4" name="Segnaposto numero diapositiva 3">
+            <a:extLst>
+              <a:ext uri="{FF2B5EF4-FFF2-40B4-BE49-F238E27FC236}">
+                <a16:creationId xmlns:a16="http://schemas.microsoft.com/office/drawing/2014/main" id="{A913163B-F546-3243-70DF-E5DE4FE73875}"/>
+              </a:ext>
+            </a:extLst>
+          </p:cNvPr>
+          <p:cNvSpPr>
+            <a:spLocks noGrp="1"/>
+          </p:cNvSpPr>
+          <p:nvPr>
+            <p:ph type="sldNum" sz="quarter" idx="12"/>
+          </p:nvPr>
+        </p:nvSpPr>
+        <p:spPr/>
+        <p:txBody>
+          <a:bodyPr/>
+          <a:lstStyle/>
+          <a:p>
+            <a:fld id="{D52F2E17-486B-469A-8A18-48E5804D6F3A}" type="slidenum">
+              <a:rPr lang="it-IT" smtClean="0"/>
+              <a:t>1</a:t>
+            </a:fld>
+            <a:endParaRPr lang="it-IT"/>
+          </a:p>
+        </p:txBody>
+      </p:sp>
+    </p:spTree>
+    <p:extLst>
+      <p:ext uri="{BB962C8B-B14F-4D97-AF65-F5344CB8AC3E}">
+        <p14:creationId xmlns:p14="http://schemas.microsoft.com/office/powerpoint/2010/main" val="267620117"/>
+      </p:ext>
+    </p:extLst>
+  </p:cSld>
+  <p:clrMapOvr>
+    <a:masterClrMapping/>
+  </p:clrMapOvr>
+</p:sld>
+</file>
+
+<file path=ppt/slides/slide10.xml><?xml version="1.0" encoding="utf-8"?>
+<p:sld xmlns:a="http://schemas.openxmlformats.org/drawingml/2006/main" xmlns:r="http://schemas.openxmlformats.org/officeDocument/2006/relationships" xmlns:p="http://schemas.openxmlformats.org/presentationml/2006/main">
+  <p:cSld>
+    <p:spTree>
+      <p:nvGrpSpPr>
+        <p:cNvPr id="1" name=""/>
+        <p:cNvGrpSpPr/>
+        <p:nvPr/>
+      </p:nvGrpSpPr>
+      <p:grpSpPr>
+        <a:xfrm>
+          <a:off x="0" y="0"/>
+          <a:ext cx="0" cy="0"/>
+          <a:chOff x="0" y="0"/>
+          <a:chExt cx="0" cy="0"/>
+        </a:xfrm>
+      </p:grpSpPr>
+      <p:sp>
+        <p:nvSpPr>
+          <p:cNvPr id="2" name="Titolo 1">
+            <a:extLst>
+              <a:ext uri="{FF2B5EF4-FFF2-40B4-BE49-F238E27FC236}">
+                <a16:creationId xmlns:a16="http://schemas.microsoft.com/office/drawing/2014/main" id="{8FD27ADA-7992-E951-182B-54254A18A76E}"/>
+              </a:ext>
+            </a:extLst>
+          </p:cNvPr>
+          <p:cNvSpPr>
+            <a:spLocks noGrp="1"/>
+          </p:cNvSpPr>
+          <p:nvPr>
+            <p:ph type="title"/>
+          </p:nvPr>
+        </p:nvSpPr>
+        <p:spPr/>
+        <p:txBody>
+          <a:bodyPr/>
+          <a:lstStyle/>
+          <a:p>
+            <a:r>
+              <a:rPr lang="it-IT" dirty="0"/>
+              <a:t>Conclusioni</a:t>
+            </a:r>
+          </a:p>
+        </p:txBody>
+      </p:sp>
+      <p:sp>
+        <p:nvSpPr>
+          <p:cNvPr id="3" name="Segnaposto numero diapositiva 2">
+            <a:extLst>
+              <a:ext uri="{FF2B5EF4-FFF2-40B4-BE49-F238E27FC236}">
+                <a16:creationId xmlns:a16="http://schemas.microsoft.com/office/drawing/2014/main" id="{1942221A-6AB4-5854-1EED-03D6655A84DF}"/>
+              </a:ext>
+            </a:extLst>
+          </p:cNvPr>
+          <p:cNvSpPr>
+            <a:spLocks noGrp="1"/>
+          </p:cNvSpPr>
+          <p:nvPr>
+            <p:ph type="sldNum" sz="quarter" idx="12"/>
+          </p:nvPr>
+        </p:nvSpPr>
+        <p:spPr/>
+        <p:txBody>
+          <a:bodyPr/>
+          <a:lstStyle/>
+          <a:p>
+            <a:fld id="{D52F2E17-486B-469A-8A18-48E5804D6F3A}" type="slidenum">
+              <a:rPr lang="it-IT" smtClean="0"/>
+              <a:t>10</a:t>
+            </a:fld>
+            <a:endParaRPr lang="it-IT"/>
+          </a:p>
+        </p:txBody>
+      </p:sp>
+      <p:sp>
+        <p:nvSpPr>
+          <p:cNvPr id="4" name="CasellaDiTesto 3">
+            <a:extLst>
+              <a:ext uri="{FF2B5EF4-FFF2-40B4-BE49-F238E27FC236}">
+                <a16:creationId xmlns:a16="http://schemas.microsoft.com/office/drawing/2014/main" id="{12E604CA-D3D8-4488-9522-7386ED539506}"/>
+              </a:ext>
+            </a:extLst>
+          </p:cNvPr>
+          <p:cNvSpPr txBox="1"/>
+          <p:nvPr/>
+        </p:nvSpPr>
+        <p:spPr>
+          <a:xfrm>
+            <a:off x="838201" y="1997613"/>
+            <a:ext cx="10515600" cy="1754326"/>
+          </a:xfrm>
+          <a:prstGeom prst="rect">
+            <a:avLst/>
+          </a:prstGeom>
+          <a:noFill/>
+        </p:spPr>
+        <p:txBody>
+          <a:bodyPr wrap="square" rtlCol="0">
+            <a:spAutoFit/>
+          </a:bodyPr>
+          <a:lstStyle/>
+          <a:p>
+            <a:pPr marL="285750" indent="-285750">
+              <a:buFont typeface="Wingdings" panose="05000000000000000000" pitchFamily="2" charset="2"/>
+              <a:buChar char="Ø"/>
+            </a:pPr>
+            <a:r>
+              <a:rPr lang="it-IT" dirty="0"/>
+              <a:t>Primo esperimento non concluso dove sono emerse criticità nell’impostazione del problema</a:t>
+            </a:r>
+          </a:p>
+          <a:p>
+            <a:pPr marL="742950" lvl="1" indent="-285750">
+              <a:buFont typeface="Wingdings" panose="05000000000000000000" pitchFamily="2" charset="2"/>
+              <a:buChar char="q"/>
+            </a:pPr>
+            <a:r>
+              <a:rPr lang="it-IT" dirty="0"/>
+              <a:t>Necessario approfondimento teorico</a:t>
+            </a:r>
+          </a:p>
+          <a:p>
+            <a:pPr marL="285750" indent="-285750">
+              <a:buFont typeface="Arial" panose="020B0604020202020204" pitchFamily="34" charset="0"/>
+              <a:buChar char="•"/>
+            </a:pPr>
+            <a:endParaRPr lang="it-IT" dirty="0"/>
+          </a:p>
+          <a:p>
+            <a:pPr marL="285750" indent="-285750">
+              <a:buFont typeface="Wingdings" panose="05000000000000000000" pitchFamily="2" charset="2"/>
+              <a:buChar char="Ø"/>
+            </a:pPr>
+            <a:r>
+              <a:rPr lang="it-IT" dirty="0"/>
+              <a:t>Nel seguito si svilupperà un progetto diverso che entra nel sensore e prende in ingresso dati provenienti da più fonti come variazione di Temperatura e Pressione nel tempo (</a:t>
+            </a:r>
+            <a:r>
+              <a:rPr lang="it-IT" dirty="0" err="1"/>
+              <a:t>nd</a:t>
+            </a:r>
+            <a:r>
+              <a:rPr lang="it-IT" dirty="0"/>
+              <a:t> serie temporale) per ricostruire flusso e portata minimizzando l’errore rispetto al riferimento</a:t>
+            </a:r>
+          </a:p>
+        </p:txBody>
+      </p:sp>
+    </p:spTree>
+    <p:extLst>
+      <p:ext uri="{BB962C8B-B14F-4D97-AF65-F5344CB8AC3E}">
+        <p14:creationId xmlns:p14="http://schemas.microsoft.com/office/powerpoint/2010/main" val="3607366823"/>
+      </p:ext>
+    </p:extLst>
+  </p:cSld>
+  <p:clrMapOvr>
+    <a:masterClrMapping/>
+  </p:clrMapOvr>
+</p:sld>
+</file>
+
+<file path=ppt/slides/slide2.xml><?xml version="1.0" encoding="utf-8"?>
+<p:sld xmlns:a="http://schemas.openxmlformats.org/drawingml/2006/main" xmlns:r="http://schemas.openxmlformats.org/officeDocument/2006/relationships" xmlns:p="http://schemas.openxmlformats.org/presentationml/2006/main">
+  <p:cSld>
+    <p:spTree>
+      <p:nvGrpSpPr>
+        <p:cNvPr id="1" name=""/>
+        <p:cNvGrpSpPr/>
+        <p:nvPr/>
+      </p:nvGrpSpPr>
+      <p:grpSpPr>
+        <a:xfrm>
+          <a:off x="0" y="0"/>
+          <a:ext cx="0" cy="0"/>
+          <a:chOff x="0" y="0"/>
+          <a:chExt cx="0" cy="0"/>
+        </a:xfrm>
+      </p:grpSpPr>
+      <p:sp>
+        <p:nvSpPr>
           <p:cNvPr id="7" name="Rettangolo 6">
             <a:extLst>
               <a:ext uri="{FF2B5EF4-FFF2-40B4-BE49-F238E27FC236}">
@@ -3759,8 +4045,8 @@
           </a:p>
         </p:txBody>
       </p:sp>
-      <mc:AlternateContent xmlns:mc="http://schemas.openxmlformats.org/markup-compatibility/2006">
-        <mc:Choice xmlns:a14="http://schemas.microsoft.com/office/drawing/2010/main" Requires="a14">
+      <mc:AlternateContent xmlns:mc="http://schemas.openxmlformats.org/markup-compatibility/2006" xmlns:a14="http://schemas.microsoft.com/office/drawing/2010/main">
+        <mc:Choice Requires="a14">
           <p:sp>
             <p:nvSpPr>
               <p:cNvPr id="4" name="CasellaDiTesto 3">
@@ -3838,7 +4124,7 @@
             </p:txBody>
           </p:sp>
         </mc:Choice>
-        <mc:Fallback>
+        <mc:Fallback xmlns="">
           <p:sp>
             <p:nvSpPr>
               <p:cNvPr id="4" name="CasellaDiTesto 3">
@@ -4402,7 +4688,10 @@
                 <a:pPr/>
                 <a14:m>
                   <m:oMathPara xmlns:m="http://schemas.openxmlformats.org/officeDocument/2006/math">
-                    <m:oMath>
+                    <m:oMathParaPr>
+                      <m:jc m:val="centerGroup"/>
+                    </m:oMathParaPr>
+                    <m:oMath xmlns:m="http://schemas.openxmlformats.org/officeDocument/2006/math">
                       <m:sSub>
                         <m:sSubPr>
                           <m:ctrlPr>
@@ -4648,7 +4937,7 @@
           <a:p>
             <a:fld id="{D52F2E17-486B-469A-8A18-48E5804D6F3A}" type="slidenum">
               <a:rPr lang="it-IT" smtClean="0"/>
-              <a:t>1</a:t>
+              <a:t>2</a:t>
             </a:fld>
             <a:endParaRPr lang="it-IT"/>
           </a:p>
@@ -4667,7 +4956,7 @@
 </p:sld>
 </file>
 
-<file path=ppt/slides/slide2.xml><?xml version="1.0" encoding="utf-8"?>
+<file path=ppt/slides/slide3.xml><?xml version="1.0" encoding="utf-8"?>
 <p:sld xmlns:a="http://schemas.openxmlformats.org/drawingml/2006/main" xmlns:r="http://schemas.openxmlformats.org/officeDocument/2006/relationships" xmlns:p="http://schemas.openxmlformats.org/presentationml/2006/main">
   <p:cSld>
     <p:spTree>
@@ -4781,7 +5070,7 @@
           <a:p>
             <a:fld id="{D52F2E17-486B-469A-8A18-48E5804D6F3A}" type="slidenum">
               <a:rPr lang="it-IT" smtClean="0"/>
-              <a:t>2</a:t>
+              <a:t>3</a:t>
             </a:fld>
             <a:endParaRPr lang="it-IT"/>
           </a:p>
@@ -4952,7 +5241,10 @@
                           </a:pPr>
                           <a14:m>
                             <m:oMathPara xmlns:m="http://schemas.openxmlformats.org/officeDocument/2006/math">
-                              <m:oMath>
+                              <m:oMathParaPr>
+                                <m:jc m:val="centerGroup"/>
+                              </m:oMathParaPr>
+                              <m:oMath xmlns:m="http://schemas.openxmlformats.org/officeDocument/2006/math">
                                 <m:sSub>
                                   <m:sSubPr>
                                     <m:ctrlPr>
@@ -8864,7 +9156,7 @@
 </p:sld>
 </file>
 
-<file path=ppt/slides/slide3.xml><?xml version="1.0" encoding="utf-8"?>
+<file path=ppt/slides/slide4.xml><?xml version="1.0" encoding="utf-8"?>
 <p:sld xmlns:a="http://schemas.openxmlformats.org/drawingml/2006/main" xmlns:r="http://schemas.openxmlformats.org/officeDocument/2006/relationships" xmlns:p="http://schemas.openxmlformats.org/presentationml/2006/main">
   <p:cSld>
     <p:spTree>
@@ -8983,11 +9275,14 @@
                 <a:pPr/>
                 <a14:m>
                   <m:oMathPara xmlns:m="http://schemas.openxmlformats.org/officeDocument/2006/math">
-                    <m:oMath>
+                    <m:oMathParaPr>
+                      <m:jc m:val="centerGroup"/>
+                    </m:oMathParaPr>
+                    <m:oMath xmlns:m="http://schemas.openxmlformats.org/officeDocument/2006/math">
                       <m:func>
                         <m:funcPr>
                           <m:ctrlPr>
-                            <a:rPr lang="it-IT" b="0" i="0" smtClean="0">
+                            <a:rPr lang="it-IT" b="0" i="1" smtClean="0">
                               <a:latin typeface="Cambria Math" panose="02040503050406030204" pitchFamily="18" charset="0"/>
                               <a:ea typeface="Cambria Math" panose="02040503050406030204" pitchFamily="18" charset="0"/>
                             </a:rPr>
@@ -11484,7 +11779,7 @@
           <a:p>
             <a:fld id="{D52F2E17-486B-469A-8A18-48E5804D6F3A}" type="slidenum">
               <a:rPr lang="it-IT" smtClean="0"/>
-              <a:t>3</a:t>
+              <a:t>4</a:t>
             </a:fld>
             <a:endParaRPr lang="it-IT"/>
           </a:p>
@@ -11503,7 +11798,7 @@
 </p:sld>
 </file>
 
-<file path=ppt/slides/slide4.xml><?xml version="1.0" encoding="utf-8"?>
+<file path=ppt/slides/slide5.xml><?xml version="1.0" encoding="utf-8"?>
 <p:sld xmlns:a="http://schemas.openxmlformats.org/drawingml/2006/main" xmlns:r="http://schemas.openxmlformats.org/officeDocument/2006/relationships" xmlns:p="http://schemas.openxmlformats.org/presentationml/2006/main">
   <p:cSld>
     <p:spTree>
@@ -11684,7 +11979,7 @@
           <a:p>
             <a:fld id="{D52F2E17-486B-469A-8A18-48E5804D6F3A}" type="slidenum">
               <a:rPr lang="it-IT" smtClean="0"/>
-              <a:t>4</a:t>
+              <a:t>5</a:t>
             </a:fld>
             <a:endParaRPr lang="it-IT" dirty="0"/>
           </a:p>
@@ -11703,7 +11998,7 @@
 </p:sld>
 </file>
 
-<file path=ppt/slides/slide5.xml><?xml version="1.0" encoding="utf-8"?>
+<file path=ppt/slides/slide6.xml><?xml version="1.0" encoding="utf-8"?>
 <p:sld xmlns:a="http://schemas.openxmlformats.org/drawingml/2006/main" xmlns:r="http://schemas.openxmlformats.org/officeDocument/2006/relationships" xmlns:p="http://schemas.openxmlformats.org/presentationml/2006/main">
   <p:cSld>
     <p:spTree>
@@ -11771,7 +12066,7 @@
           <a:p>
             <a:fld id="{D52F2E17-486B-469A-8A18-48E5804D6F3A}" type="slidenum">
               <a:rPr lang="it-IT" smtClean="0"/>
-              <a:t>5</a:t>
+              <a:t>6</a:t>
             </a:fld>
             <a:endParaRPr lang="it-IT"/>
           </a:p>
@@ -11848,7 +12143,7 @@
             </a:pPr>
             <a:r>
               <a:rPr lang="it-IT" dirty="0"/>
-              <a:t>Una proposta per il </a:t>
+              <a:t>Una prima proposta per il </a:t>
             </a:r>
             <a:r>
               <a:rPr lang="it-IT" dirty="0" err="1"/>
@@ -11874,7 +12169,7 @@
 </p:sld>
 </file>
 
-<file path=ppt/slides/slide6.xml><?xml version="1.0" encoding="utf-8"?>
+<file path=ppt/slides/slide7.xml><?xml version="1.0" encoding="utf-8"?>
 <p:sld xmlns:a="http://schemas.openxmlformats.org/drawingml/2006/main" xmlns:r="http://schemas.openxmlformats.org/officeDocument/2006/relationships" xmlns:p="http://schemas.openxmlformats.org/presentationml/2006/main">
   <p:cSld>
     <p:spTree>
@@ -12078,7 +12373,7 @@
           <a:p>
             <a:fld id="{D52F2E17-486B-469A-8A18-48E5804D6F3A}" type="slidenum">
               <a:rPr lang="it-IT" smtClean="0"/>
-              <a:t>6</a:t>
+              <a:t>7</a:t>
             </a:fld>
             <a:endParaRPr lang="it-IT" dirty="0"/>
           </a:p>
@@ -12097,7 +12392,7 @@
 </p:sld>
 </file>
 
-<file path=ppt/slides/slide7.xml><?xml version="1.0" encoding="utf-8"?>
+<file path=ppt/slides/slide8.xml><?xml version="1.0" encoding="utf-8"?>
 <p:sld xmlns:a="http://schemas.openxmlformats.org/drawingml/2006/main" xmlns:r="http://schemas.openxmlformats.org/officeDocument/2006/relationships" xmlns:p="http://schemas.openxmlformats.org/presentationml/2006/main">
   <p:cSld>
     <p:spTree>
@@ -12165,1384 +12460,254 @@
           <a:p>
             <a:fld id="{D52F2E17-486B-469A-8A18-48E5804D6F3A}" type="slidenum">
               <a:rPr lang="it-IT" smtClean="0"/>
-              <a:t>7</a:t>
+              <a:t>8</a:t>
             </a:fld>
             <a:endParaRPr lang="it-IT"/>
           </a:p>
         </p:txBody>
       </p:sp>
-      <p:graphicFrame>
-        <p:nvGraphicFramePr>
-          <p:cNvPr id="9" name="Tabella 8">
+      <p:pic>
+        <p:nvPicPr>
+          <p:cNvPr id="5" name="Immagine 4">
             <a:extLst>
               <a:ext uri="{FF2B5EF4-FFF2-40B4-BE49-F238E27FC236}">
-                <a16:creationId xmlns:a16="http://schemas.microsoft.com/office/drawing/2014/main" id="{6A07B964-3F87-57CA-BFB6-B12DB0422053}"/>
+                <a16:creationId xmlns:a16="http://schemas.microsoft.com/office/drawing/2014/main" id="{894514E2-978D-95BE-33AA-DCB6625A58CD}"/>
               </a:ext>
             </a:extLst>
           </p:cNvPr>
-          <p:cNvGraphicFramePr>
-            <a:graphicFrameLocks noGrp="1"/>
-          </p:cNvGraphicFramePr>
-          <p:nvPr>
-            <p:extLst>
-              <p:ext uri="{D42A27DB-BD31-4B8C-83A1-F6EECF244321}">
-                <p14:modId xmlns:p14="http://schemas.microsoft.com/office/powerpoint/2010/main" val="1292752266"/>
-              </p:ext>
-            </p:extLst>
-          </p:nvPr>
-        </p:nvGraphicFramePr>
-        <p:xfrm>
-          <a:off x="3440694" y="1994313"/>
-          <a:ext cx="5310612" cy="3684111"/>
-        </p:xfrm>
-        <a:graphic>
-          <a:graphicData uri="http://schemas.openxmlformats.org/drawingml/2006/table">
-            <a:tbl>
-              <a:tblPr firstRow="1" bandRow="1">
-                <a:tableStyleId>{5C22544A-7EE6-4342-B048-85BDC9FD1C3A}</a:tableStyleId>
-              </a:tblPr>
-              <a:tblGrid>
-                <a:gridCol w="418572">
-                  <a:extLst>
-                    <a:ext uri="{9D8B030D-6E8A-4147-A177-3AD203B41FA5}">
-                      <a16:colId xmlns:a16="http://schemas.microsoft.com/office/drawing/2014/main" val="3344666190"/>
-                    </a:ext>
-                  </a:extLst>
-                </a:gridCol>
-                <a:gridCol w="978408">
-                  <a:extLst>
-                    <a:ext uri="{9D8B030D-6E8A-4147-A177-3AD203B41FA5}">
-                      <a16:colId xmlns:a16="http://schemas.microsoft.com/office/drawing/2014/main" val="3110726661"/>
-                    </a:ext>
-                  </a:extLst>
-                </a:gridCol>
-                <a:gridCol w="1069848">
-                  <a:extLst>
-                    <a:ext uri="{9D8B030D-6E8A-4147-A177-3AD203B41FA5}">
-                      <a16:colId xmlns:a16="http://schemas.microsoft.com/office/drawing/2014/main" val="565712884"/>
-                    </a:ext>
-                  </a:extLst>
-                </a:gridCol>
-                <a:gridCol w="1124712">
-                  <a:extLst>
-                    <a:ext uri="{9D8B030D-6E8A-4147-A177-3AD203B41FA5}">
-                      <a16:colId xmlns:a16="http://schemas.microsoft.com/office/drawing/2014/main" val="2547326180"/>
-                    </a:ext>
-                  </a:extLst>
-                </a:gridCol>
-                <a:gridCol w="574516">
-                  <a:extLst>
-                    <a:ext uri="{9D8B030D-6E8A-4147-A177-3AD203B41FA5}">
-                      <a16:colId xmlns:a16="http://schemas.microsoft.com/office/drawing/2014/main" val="1598952346"/>
-                    </a:ext>
-                  </a:extLst>
-                </a:gridCol>
-                <a:gridCol w="1144556">
-                  <a:extLst>
-                    <a:ext uri="{9D8B030D-6E8A-4147-A177-3AD203B41FA5}">
-                      <a16:colId xmlns:a16="http://schemas.microsoft.com/office/drawing/2014/main" val="3286388745"/>
-                    </a:ext>
-                  </a:extLst>
-                </a:gridCol>
-              </a:tblGrid>
-              <a:tr h="392271">
-                <a:tc>
-                  <a:txBody>
-                    <a:bodyPr/>
-                    <a:lstStyle/>
-                    <a:p>
-                      <a:pPr algn="ctr"/>
-                      <a:r>
-                        <a:rPr lang="it-IT" dirty="0"/>
-                        <a:t>ID</a:t>
-                      </a:r>
-                    </a:p>
-                  </a:txBody>
-                  <a:tcPr/>
-                </a:tc>
-                <a:tc>
-                  <a:txBody>
-                    <a:bodyPr/>
-                    <a:lstStyle/>
-                    <a:p>
-                      <a:pPr algn="ctr"/>
-                      <a:r>
-                        <a:rPr lang="it-IT" dirty="0"/>
-                        <a:t>Test</a:t>
-                      </a:r>
-                    </a:p>
-                  </a:txBody>
-                  <a:tcPr/>
-                </a:tc>
-                <a:tc>
-                  <a:txBody>
-                    <a:bodyPr/>
-                    <a:lstStyle/>
-                    <a:p>
-                      <a:pPr marL="0" indent="0" algn="ctr">
-                        <a:buFont typeface="Arial" panose="020B0604020202020204" pitchFamily="34" charset="0"/>
-                        <a:buNone/>
-                      </a:pPr>
-                      <a:r>
-                        <a:rPr lang="it-IT" dirty="0"/>
-                        <a:t>∆ sens-1</a:t>
-                      </a:r>
-                    </a:p>
-                  </a:txBody>
-                  <a:tcPr/>
-                </a:tc>
-                <a:tc>
-                  <a:txBody>
-                    <a:bodyPr/>
-                    <a:lstStyle/>
-                    <a:p>
-                      <a:pPr marL="0" indent="0" algn="ctr">
-                        <a:buFont typeface="Arial" panose="020B0604020202020204" pitchFamily="34" charset="0"/>
-                        <a:buNone/>
-                      </a:pPr>
-                      <a:r>
-                        <a:rPr lang="it-IT" dirty="0"/>
-                        <a:t>∆ sens-2</a:t>
-                      </a:r>
-                    </a:p>
-                  </a:txBody>
-                  <a:tcPr/>
-                </a:tc>
-                <a:tc>
-                  <a:txBody>
-                    <a:bodyPr/>
-                    <a:lstStyle/>
-                    <a:p>
-                      <a:pPr marL="0" indent="0" algn="ctr">
-                        <a:buFont typeface="Arial" panose="020B0604020202020204" pitchFamily="34" charset="0"/>
-                        <a:buNone/>
-                      </a:pPr>
-                      <a:r>
-                        <a:rPr lang="it-IT" dirty="0"/>
-                        <a:t>…</a:t>
-                      </a:r>
-                    </a:p>
-                  </a:txBody>
-                  <a:tcPr/>
-                </a:tc>
-                <a:tc>
-                  <a:txBody>
-                    <a:bodyPr/>
-                    <a:lstStyle/>
-                    <a:p>
-                      <a:pPr marL="0" indent="0" algn="ctr">
-                        <a:buFont typeface="Arial" panose="020B0604020202020204" pitchFamily="34" charset="0"/>
-                        <a:buNone/>
-                      </a:pPr>
-                      <a:r>
-                        <a:rPr lang="it-IT" dirty="0"/>
-                        <a:t>∆ </a:t>
-                      </a:r>
-                      <a:r>
-                        <a:rPr lang="it-IT" dirty="0" err="1"/>
-                        <a:t>sens</a:t>
-                      </a:r>
-                      <a:r>
-                        <a:rPr lang="it-IT" dirty="0"/>
-                        <a:t>-N</a:t>
-                      </a:r>
-                    </a:p>
-                  </a:txBody>
-                  <a:tcPr/>
-                </a:tc>
-                <a:extLst>
-                  <a:ext uri="{0D108BD9-81ED-4DB2-BD59-A6C34878D82A}">
-                    <a16:rowId xmlns:a16="http://schemas.microsoft.com/office/drawing/2014/main" val="448706107"/>
-                  </a:ext>
-                </a:extLst>
-              </a:tr>
-              <a:tr h="345245">
-                <a:tc>
-                  <a:txBody>
-                    <a:bodyPr/>
-                    <a:lstStyle/>
-                    <a:p>
-                      <a:pPr algn="ctr"/>
-                      <a:r>
-                        <a:rPr lang="it-IT" dirty="0"/>
-                        <a:t>1</a:t>
-                      </a:r>
-                    </a:p>
-                  </a:txBody>
-                  <a:tcPr/>
-                </a:tc>
-                <a:tc>
-                  <a:txBody>
-                    <a:bodyPr/>
-                    <a:lstStyle/>
-                    <a:p>
-                      <a:pPr algn="ctr"/>
-                      <a:r>
-                        <a:rPr lang="it-IT" dirty="0"/>
-                        <a:t>max</a:t>
-                      </a:r>
-                    </a:p>
-                  </a:txBody>
-                  <a:tcPr/>
-                </a:tc>
-                <a:tc>
-                  <a:txBody>
-                    <a:bodyPr/>
-                    <a:lstStyle/>
-                    <a:p>
-                      <a:pPr marL="0" algn="ctr" defTabSz="914400" rtl="0" eaLnBrk="1" fontAlgn="b" latinLnBrk="0" hangingPunct="1">
-                        <a:buNone/>
-                      </a:pPr>
-                      <a:r>
-                        <a:rPr lang="it-IT" sz="1800" kern="1200" dirty="0">
-                          <a:solidFill>
-                            <a:schemeClr val="dk1"/>
-                          </a:solidFill>
-                          <a:latin typeface="+mn-lt"/>
-                          <a:ea typeface="+mn-ea"/>
-                          <a:cs typeface="+mn-cs"/>
-                        </a:rPr>
-                        <a:t>-6,978</a:t>
-                      </a:r>
-                    </a:p>
-                  </a:txBody>
-                  <a:tcPr marL="9525" marR="9525" marT="9525" marB="0" anchor="b"/>
-                </a:tc>
-                <a:tc>
-                  <a:txBody>
-                    <a:bodyPr/>
-                    <a:lstStyle/>
-                    <a:p>
-                      <a:pPr marL="0" algn="ctr" defTabSz="914400" rtl="0" eaLnBrk="1" fontAlgn="b" latinLnBrk="0" hangingPunct="1">
-                        <a:buNone/>
-                      </a:pPr>
-                      <a:r>
-                        <a:rPr lang="it-IT" sz="1800" kern="1200" dirty="0">
-                          <a:solidFill>
-                            <a:schemeClr val="dk1"/>
-                          </a:solidFill>
-                          <a:latin typeface="+mn-lt"/>
-                          <a:ea typeface="+mn-ea"/>
-                          <a:cs typeface="+mn-cs"/>
-                        </a:rPr>
-                        <a:t>-7,800</a:t>
-                      </a:r>
-                    </a:p>
-                  </a:txBody>
-                  <a:tcPr marL="9525" marR="9525" marT="9525" marB="0" anchor="b"/>
-                </a:tc>
-                <a:tc>
-                  <a:txBody>
-                    <a:bodyPr/>
-                    <a:lstStyle/>
-                    <a:p>
-                      <a:pPr marL="0" algn="ctr" defTabSz="914400" rtl="0" eaLnBrk="1" fontAlgn="b" latinLnBrk="0" hangingPunct="1">
-                        <a:buNone/>
-                      </a:pPr>
-                      <a:endParaRPr lang="it-IT" sz="1800" kern="1200" dirty="0">
-                        <a:solidFill>
-                          <a:schemeClr val="dk1"/>
-                        </a:solidFill>
-                        <a:latin typeface="+mn-lt"/>
-                        <a:ea typeface="+mn-ea"/>
-                        <a:cs typeface="+mn-cs"/>
-                      </a:endParaRPr>
-                    </a:p>
-                  </a:txBody>
-                  <a:tcPr marL="9525" marR="9525" marT="9525" marB="0" anchor="b"/>
-                </a:tc>
-                <a:tc>
-                  <a:txBody>
-                    <a:bodyPr/>
-                    <a:lstStyle/>
-                    <a:p>
-                      <a:pPr marL="0" algn="ctr" defTabSz="914400" rtl="0" eaLnBrk="1" fontAlgn="b" latinLnBrk="0" hangingPunct="1">
-                        <a:buNone/>
-                      </a:pPr>
-                      <a:r>
-                        <a:rPr lang="it-IT" sz="1800" kern="1200" dirty="0">
-                          <a:solidFill>
-                            <a:schemeClr val="dk1"/>
-                          </a:solidFill>
-                          <a:latin typeface="+mn-lt"/>
-                          <a:ea typeface="+mn-ea"/>
-                          <a:cs typeface="+mn-cs"/>
-                        </a:rPr>
-                        <a:t>-8,021</a:t>
-                      </a:r>
-                    </a:p>
-                  </a:txBody>
-                  <a:tcPr marL="9525" marR="9525" marT="9525" marB="0" anchor="b"/>
-                </a:tc>
-                <a:extLst>
-                  <a:ext uri="{0D108BD9-81ED-4DB2-BD59-A6C34878D82A}">
-                    <a16:rowId xmlns:a16="http://schemas.microsoft.com/office/drawing/2014/main" val="933168771"/>
-                  </a:ext>
-                </a:extLst>
-              </a:tr>
-              <a:tr h="345245">
-                <a:tc>
-                  <a:txBody>
-                    <a:bodyPr/>
-                    <a:lstStyle/>
-                    <a:p>
-                      <a:pPr algn="ctr"/>
-                      <a:r>
-                        <a:rPr lang="it-IT" dirty="0"/>
-                        <a:t>2</a:t>
-                      </a:r>
-                    </a:p>
-                  </a:txBody>
-                  <a:tcPr/>
-                </a:tc>
-                <a:tc>
-                  <a:txBody>
-                    <a:bodyPr/>
-                    <a:lstStyle/>
-                    <a:p>
-                      <a:pPr marL="0" algn="ctr" defTabSz="914400" rtl="0" eaLnBrk="1" fontAlgn="b" latinLnBrk="0" hangingPunct="1">
-                        <a:buNone/>
-                      </a:pPr>
-                      <a:r>
-                        <a:rPr lang="it-IT" sz="1800" kern="1200" dirty="0">
-                          <a:solidFill>
-                            <a:schemeClr val="dk1"/>
-                          </a:solidFill>
-                          <a:latin typeface="+mn-lt"/>
-                          <a:ea typeface="+mn-ea"/>
-                          <a:cs typeface="+mn-cs"/>
-                        </a:rPr>
-                        <a:t>0,7*max</a:t>
-                      </a:r>
-                    </a:p>
-                  </a:txBody>
-                  <a:tcPr marL="6350" marR="6350" marT="6350" marB="0" anchor="b"/>
-                </a:tc>
-                <a:tc>
-                  <a:txBody>
-                    <a:bodyPr/>
-                    <a:lstStyle/>
-                    <a:p>
-                      <a:pPr marL="0" algn="ctr" defTabSz="914400" rtl="0" eaLnBrk="1" fontAlgn="b" latinLnBrk="0" hangingPunct="1">
-                        <a:buNone/>
-                      </a:pPr>
-                      <a:r>
-                        <a:rPr lang="it-IT" sz="1800" kern="1200" dirty="0">
-                          <a:solidFill>
-                            <a:schemeClr val="dk1"/>
-                          </a:solidFill>
-                          <a:latin typeface="+mn-lt"/>
-                          <a:ea typeface="+mn-ea"/>
-                          <a:cs typeface="+mn-cs"/>
-                        </a:rPr>
-                        <a:t>-5,758</a:t>
-                      </a:r>
-                    </a:p>
-                  </a:txBody>
-                  <a:tcPr marL="9525" marR="9525" marT="9525" marB="0" anchor="b"/>
-                </a:tc>
-                <a:tc>
-                  <a:txBody>
-                    <a:bodyPr/>
-                    <a:lstStyle/>
-                    <a:p>
-                      <a:pPr marL="0" algn="ctr" defTabSz="914400" rtl="0" eaLnBrk="1" fontAlgn="b" latinLnBrk="0" hangingPunct="1">
-                        <a:buNone/>
-                      </a:pPr>
-                      <a:r>
-                        <a:rPr lang="it-IT" sz="1800" kern="1200" dirty="0">
-                          <a:solidFill>
-                            <a:schemeClr val="dk1"/>
-                          </a:solidFill>
-                          <a:latin typeface="+mn-lt"/>
-                          <a:ea typeface="+mn-ea"/>
-                          <a:cs typeface="+mn-cs"/>
-                        </a:rPr>
-                        <a:t>-6,020</a:t>
-                      </a:r>
-                    </a:p>
-                  </a:txBody>
-                  <a:tcPr marL="9525" marR="9525" marT="9525" marB="0" anchor="b"/>
-                </a:tc>
-                <a:tc>
-                  <a:txBody>
-                    <a:bodyPr/>
-                    <a:lstStyle/>
-                    <a:p>
-                      <a:pPr marL="0" algn="ctr" defTabSz="914400" rtl="0" eaLnBrk="1" fontAlgn="b" latinLnBrk="0" hangingPunct="1">
-                        <a:buNone/>
-                      </a:pPr>
-                      <a:endParaRPr lang="it-IT" sz="1800" kern="1200" dirty="0">
-                        <a:solidFill>
-                          <a:schemeClr val="dk1"/>
-                        </a:solidFill>
-                        <a:latin typeface="+mn-lt"/>
-                        <a:ea typeface="+mn-ea"/>
-                        <a:cs typeface="+mn-cs"/>
-                      </a:endParaRPr>
-                    </a:p>
-                  </a:txBody>
-                  <a:tcPr marL="9525" marR="9525" marT="9525" marB="0" anchor="b"/>
-                </a:tc>
-                <a:tc>
-                  <a:txBody>
-                    <a:bodyPr/>
-                    <a:lstStyle/>
-                    <a:p>
-                      <a:pPr marL="0" algn="ctr" defTabSz="914400" rtl="0" eaLnBrk="1" fontAlgn="b" latinLnBrk="0" hangingPunct="1">
-                        <a:buNone/>
-                      </a:pPr>
-                      <a:r>
-                        <a:rPr lang="it-IT" sz="1800" kern="1200" dirty="0">
-                          <a:solidFill>
-                            <a:schemeClr val="dk1"/>
-                          </a:solidFill>
-                          <a:latin typeface="+mn-lt"/>
-                          <a:ea typeface="+mn-ea"/>
-                          <a:cs typeface="+mn-cs"/>
-                        </a:rPr>
-                        <a:t>-6,126</a:t>
-                      </a:r>
-                    </a:p>
-                  </a:txBody>
-                  <a:tcPr marL="9525" marR="9525" marT="9525" marB="0" anchor="b"/>
-                </a:tc>
-                <a:extLst>
-                  <a:ext uri="{0D108BD9-81ED-4DB2-BD59-A6C34878D82A}">
-                    <a16:rowId xmlns:a16="http://schemas.microsoft.com/office/drawing/2014/main" val="3879499758"/>
-                  </a:ext>
-                </a:extLst>
-              </a:tr>
-              <a:tr h="345245">
-                <a:tc>
-                  <a:txBody>
-                    <a:bodyPr/>
-                    <a:lstStyle/>
-                    <a:p>
-                      <a:pPr algn="ctr"/>
-                      <a:r>
-                        <a:rPr lang="it-IT" dirty="0"/>
-                        <a:t>3</a:t>
-                      </a:r>
-                    </a:p>
-                  </a:txBody>
-                  <a:tcPr/>
-                </a:tc>
-                <a:tc>
-                  <a:txBody>
-                    <a:bodyPr/>
-                    <a:lstStyle/>
-                    <a:p>
-                      <a:pPr marL="0" algn="ctr" defTabSz="914400" rtl="0" eaLnBrk="1" fontAlgn="b" latinLnBrk="0" hangingPunct="1">
-                        <a:buNone/>
-                      </a:pPr>
-                      <a:r>
-                        <a:rPr lang="it-IT" sz="1800" kern="1200" dirty="0">
-                          <a:solidFill>
-                            <a:schemeClr val="dk1"/>
-                          </a:solidFill>
-                          <a:latin typeface="+mn-lt"/>
-                          <a:ea typeface="+mn-ea"/>
-                          <a:cs typeface="+mn-cs"/>
-                        </a:rPr>
-                        <a:t>0,4*max</a:t>
-                      </a:r>
-                    </a:p>
-                  </a:txBody>
-                  <a:tcPr marL="6350" marR="6350" marT="6350" marB="0" anchor="b"/>
-                </a:tc>
-                <a:tc>
-                  <a:txBody>
-                    <a:bodyPr/>
-                    <a:lstStyle/>
-                    <a:p>
-                      <a:pPr marL="0" algn="ctr" defTabSz="914400" rtl="0" eaLnBrk="1" fontAlgn="b" latinLnBrk="0" hangingPunct="1">
-                        <a:buNone/>
-                      </a:pPr>
-                      <a:r>
-                        <a:rPr lang="it-IT" sz="1800" kern="1200" dirty="0">
-                          <a:solidFill>
-                            <a:schemeClr val="dk1"/>
-                          </a:solidFill>
-                          <a:latin typeface="+mn-lt"/>
-                          <a:ea typeface="+mn-ea"/>
-                          <a:cs typeface="+mn-cs"/>
-                        </a:rPr>
-                        <a:t>-1,809</a:t>
-                      </a:r>
-                    </a:p>
-                  </a:txBody>
-                  <a:tcPr marL="9525" marR="9525" marT="9525" marB="0" anchor="b"/>
-                </a:tc>
-                <a:tc>
-                  <a:txBody>
-                    <a:bodyPr/>
-                    <a:lstStyle/>
-                    <a:p>
-                      <a:pPr marL="0" algn="ctr" defTabSz="914400" rtl="0" eaLnBrk="1" fontAlgn="b" latinLnBrk="0" hangingPunct="1">
-                        <a:buNone/>
-                      </a:pPr>
-                      <a:r>
-                        <a:rPr lang="it-IT" sz="1800" kern="1200" dirty="0">
-                          <a:solidFill>
-                            <a:schemeClr val="dk1"/>
-                          </a:solidFill>
-                          <a:latin typeface="+mn-lt"/>
-                          <a:ea typeface="+mn-ea"/>
-                          <a:cs typeface="+mn-cs"/>
-                        </a:rPr>
-                        <a:t>-2,174</a:t>
-                      </a:r>
-                    </a:p>
-                  </a:txBody>
-                  <a:tcPr marL="9525" marR="9525" marT="9525" marB="0" anchor="b"/>
-                </a:tc>
-                <a:tc>
-                  <a:txBody>
-                    <a:bodyPr/>
-                    <a:lstStyle/>
-                    <a:p>
-                      <a:pPr marL="0" algn="ctr" defTabSz="914400" rtl="0" eaLnBrk="1" fontAlgn="b" latinLnBrk="0" hangingPunct="1">
-                        <a:buNone/>
-                      </a:pPr>
-                      <a:endParaRPr lang="it-IT" sz="1800" kern="1200" dirty="0">
-                        <a:solidFill>
-                          <a:schemeClr val="dk1"/>
-                        </a:solidFill>
-                        <a:latin typeface="+mn-lt"/>
-                        <a:ea typeface="+mn-ea"/>
-                        <a:cs typeface="+mn-cs"/>
-                      </a:endParaRPr>
-                    </a:p>
-                  </a:txBody>
-                  <a:tcPr marL="9525" marR="9525" marT="9525" marB="0" anchor="b"/>
-                </a:tc>
-                <a:tc>
-                  <a:txBody>
-                    <a:bodyPr/>
-                    <a:lstStyle/>
-                    <a:p>
-                      <a:pPr marL="0" algn="ctr" defTabSz="914400" rtl="0" eaLnBrk="1" fontAlgn="b" latinLnBrk="0" hangingPunct="1">
-                        <a:buNone/>
-                      </a:pPr>
-                      <a:r>
-                        <a:rPr lang="it-IT" sz="1800" kern="1200" dirty="0">
-                          <a:solidFill>
-                            <a:schemeClr val="dk1"/>
-                          </a:solidFill>
-                          <a:latin typeface="+mn-lt"/>
-                          <a:ea typeface="+mn-ea"/>
-                          <a:cs typeface="+mn-cs"/>
-                        </a:rPr>
-                        <a:t>-2,533</a:t>
-                      </a:r>
-                    </a:p>
-                  </a:txBody>
-                  <a:tcPr marL="9525" marR="9525" marT="9525" marB="0" anchor="b"/>
-                </a:tc>
-                <a:extLst>
-                  <a:ext uri="{0D108BD9-81ED-4DB2-BD59-A6C34878D82A}">
-                    <a16:rowId xmlns:a16="http://schemas.microsoft.com/office/drawing/2014/main" val="3499223146"/>
-                  </a:ext>
-                </a:extLst>
-              </a:tr>
-              <a:tr h="345245">
-                <a:tc>
-                  <a:txBody>
-                    <a:bodyPr/>
-                    <a:lstStyle/>
-                    <a:p>
-                      <a:pPr algn="ctr"/>
-                      <a:r>
-                        <a:rPr lang="it-IT" dirty="0"/>
-                        <a:t>4</a:t>
-                      </a:r>
-                    </a:p>
-                  </a:txBody>
-                  <a:tcPr/>
-                </a:tc>
-                <a:tc>
-                  <a:txBody>
-                    <a:bodyPr/>
-                    <a:lstStyle/>
-                    <a:p>
-                      <a:pPr marL="0" algn="ctr" defTabSz="914400" rtl="0" eaLnBrk="1" fontAlgn="b" latinLnBrk="0" hangingPunct="1">
-                        <a:buNone/>
-                      </a:pPr>
-                      <a:r>
-                        <a:rPr lang="it-IT" sz="1800" kern="1200" dirty="0">
-                          <a:solidFill>
-                            <a:schemeClr val="dk1"/>
-                          </a:solidFill>
-                          <a:latin typeface="+mn-lt"/>
-                          <a:ea typeface="+mn-ea"/>
-                          <a:cs typeface="+mn-cs"/>
-                        </a:rPr>
-                        <a:t>0,2*max</a:t>
-                      </a:r>
-                    </a:p>
-                  </a:txBody>
-                  <a:tcPr marL="6350" marR="6350" marT="6350" marB="0" anchor="b"/>
-                </a:tc>
-                <a:tc>
-                  <a:txBody>
-                    <a:bodyPr/>
-                    <a:lstStyle/>
-                    <a:p>
-                      <a:pPr marL="0" algn="ctr" defTabSz="914400" rtl="0" eaLnBrk="1" fontAlgn="b" latinLnBrk="0" hangingPunct="1">
-                        <a:buNone/>
-                      </a:pPr>
-                      <a:r>
-                        <a:rPr lang="it-IT" sz="1800" kern="1200">
-                          <a:solidFill>
-                            <a:schemeClr val="dk1"/>
-                          </a:solidFill>
-                          <a:latin typeface="+mn-lt"/>
-                          <a:ea typeface="+mn-ea"/>
-                          <a:cs typeface="+mn-cs"/>
-                        </a:rPr>
-                        <a:t>-0,414</a:t>
-                      </a:r>
-                    </a:p>
-                  </a:txBody>
-                  <a:tcPr marL="9525" marR="9525" marT="9525" marB="0" anchor="b"/>
-                </a:tc>
-                <a:tc>
-                  <a:txBody>
-                    <a:bodyPr/>
-                    <a:lstStyle/>
-                    <a:p>
-                      <a:pPr marL="0" algn="ctr" defTabSz="914400" rtl="0" eaLnBrk="1" fontAlgn="b" latinLnBrk="0" hangingPunct="1">
-                        <a:buNone/>
-                      </a:pPr>
-                      <a:r>
-                        <a:rPr lang="it-IT" sz="1800" kern="1200" dirty="0">
-                          <a:solidFill>
-                            <a:schemeClr val="dk1"/>
-                          </a:solidFill>
-                          <a:latin typeface="+mn-lt"/>
-                          <a:ea typeface="+mn-ea"/>
-                          <a:cs typeface="+mn-cs"/>
-                        </a:rPr>
-                        <a:t>-0,313</a:t>
-                      </a:r>
-                    </a:p>
-                  </a:txBody>
-                  <a:tcPr marL="9525" marR="9525" marT="9525" marB="0" anchor="b"/>
-                </a:tc>
-                <a:tc>
-                  <a:txBody>
-                    <a:bodyPr/>
-                    <a:lstStyle/>
-                    <a:p>
-                      <a:pPr marL="0" algn="ctr" defTabSz="914400" rtl="0" eaLnBrk="1" fontAlgn="b" latinLnBrk="0" hangingPunct="1">
-                        <a:buNone/>
-                      </a:pPr>
-                      <a:endParaRPr lang="it-IT" sz="1800" kern="1200" dirty="0">
-                        <a:solidFill>
-                          <a:schemeClr val="dk1"/>
-                        </a:solidFill>
-                        <a:latin typeface="+mn-lt"/>
-                        <a:ea typeface="+mn-ea"/>
-                        <a:cs typeface="+mn-cs"/>
-                      </a:endParaRPr>
-                    </a:p>
-                  </a:txBody>
-                  <a:tcPr marL="9525" marR="9525" marT="9525" marB="0" anchor="b"/>
-                </a:tc>
-                <a:tc>
-                  <a:txBody>
-                    <a:bodyPr/>
-                    <a:lstStyle/>
-                    <a:p>
-                      <a:pPr marL="0" algn="ctr" defTabSz="914400" rtl="0" eaLnBrk="1" fontAlgn="b" latinLnBrk="0" hangingPunct="1">
-                        <a:buNone/>
-                      </a:pPr>
-                      <a:r>
-                        <a:rPr lang="it-IT" sz="1800" kern="1200" dirty="0">
-                          <a:solidFill>
-                            <a:schemeClr val="dk1"/>
-                          </a:solidFill>
-                          <a:latin typeface="+mn-lt"/>
-                          <a:ea typeface="+mn-ea"/>
-                          <a:cs typeface="+mn-cs"/>
-                        </a:rPr>
-                        <a:t>-0,447</a:t>
-                      </a:r>
-                    </a:p>
-                  </a:txBody>
-                  <a:tcPr marL="9525" marR="9525" marT="9525" marB="0" anchor="b"/>
-                </a:tc>
-                <a:extLst>
-                  <a:ext uri="{0D108BD9-81ED-4DB2-BD59-A6C34878D82A}">
-                    <a16:rowId xmlns:a16="http://schemas.microsoft.com/office/drawing/2014/main" val="1055603956"/>
-                  </a:ext>
-                </a:extLst>
-              </a:tr>
-              <a:tr h="345245">
-                <a:tc>
-                  <a:txBody>
-                    <a:bodyPr/>
-                    <a:lstStyle/>
-                    <a:p>
-                      <a:pPr algn="ctr"/>
-                      <a:r>
-                        <a:rPr lang="it-IT" dirty="0"/>
-                        <a:t>5</a:t>
-                      </a:r>
-                    </a:p>
-                  </a:txBody>
-                  <a:tcPr/>
-                </a:tc>
-                <a:tc>
-                  <a:txBody>
-                    <a:bodyPr/>
-                    <a:lstStyle/>
-                    <a:p>
-                      <a:pPr marL="0" algn="ctr" defTabSz="914400" rtl="0" eaLnBrk="1" fontAlgn="b" latinLnBrk="0" hangingPunct="1">
-                        <a:buNone/>
-                      </a:pPr>
-                      <a:r>
-                        <a:rPr lang="it-IT" sz="1800" kern="1200" dirty="0">
-                          <a:solidFill>
-                            <a:schemeClr val="dk1"/>
-                          </a:solidFill>
-                          <a:latin typeface="+mn-lt"/>
-                          <a:ea typeface="+mn-ea"/>
-                          <a:cs typeface="+mn-cs"/>
-                        </a:rPr>
-                        <a:t>0,1*max</a:t>
-                      </a:r>
-                    </a:p>
-                  </a:txBody>
-                  <a:tcPr marL="6350" marR="6350" marT="6350" marB="0" anchor="b"/>
-                </a:tc>
-                <a:tc>
-                  <a:txBody>
-                    <a:bodyPr/>
-                    <a:lstStyle/>
-                    <a:p>
-                      <a:pPr marL="0" algn="ctr" defTabSz="914400" rtl="0" eaLnBrk="1" fontAlgn="b" latinLnBrk="0" hangingPunct="1">
-                        <a:buNone/>
-                      </a:pPr>
-                      <a:r>
-                        <a:rPr lang="it-IT" sz="1800" kern="1200" dirty="0">
-                          <a:solidFill>
-                            <a:schemeClr val="dk1"/>
-                          </a:solidFill>
-                          <a:latin typeface="+mn-lt"/>
-                          <a:ea typeface="+mn-ea"/>
-                          <a:cs typeface="+mn-cs"/>
-                        </a:rPr>
-                        <a:t>-0,186</a:t>
-                      </a:r>
-                    </a:p>
-                  </a:txBody>
-                  <a:tcPr marL="9525" marR="9525" marT="9525" marB="0" anchor="b"/>
-                </a:tc>
-                <a:tc>
-                  <a:txBody>
-                    <a:bodyPr/>
-                    <a:lstStyle/>
-                    <a:p>
-                      <a:pPr marL="0" algn="ctr" defTabSz="914400" rtl="0" eaLnBrk="1" fontAlgn="b" latinLnBrk="0" hangingPunct="1">
-                        <a:buNone/>
-                      </a:pPr>
-                      <a:r>
-                        <a:rPr lang="it-IT" sz="1800" kern="1200" dirty="0">
-                          <a:solidFill>
-                            <a:schemeClr val="dk1"/>
-                          </a:solidFill>
-                          <a:latin typeface="+mn-lt"/>
-                          <a:ea typeface="+mn-ea"/>
-                          <a:cs typeface="+mn-cs"/>
-                        </a:rPr>
-                        <a:t>-0,143</a:t>
-                      </a:r>
-                    </a:p>
-                  </a:txBody>
-                  <a:tcPr marL="9525" marR="9525" marT="9525" marB="0" anchor="b"/>
-                </a:tc>
-                <a:tc>
-                  <a:txBody>
-                    <a:bodyPr/>
-                    <a:lstStyle/>
-                    <a:p>
-                      <a:pPr marL="0" algn="ctr" defTabSz="914400" rtl="0" eaLnBrk="1" fontAlgn="b" latinLnBrk="0" hangingPunct="1">
-                        <a:buNone/>
-                      </a:pPr>
-                      <a:endParaRPr lang="it-IT" sz="1800" kern="1200" dirty="0">
-                        <a:solidFill>
-                          <a:schemeClr val="dk1"/>
-                        </a:solidFill>
-                        <a:latin typeface="+mn-lt"/>
-                        <a:ea typeface="+mn-ea"/>
-                        <a:cs typeface="+mn-cs"/>
-                      </a:endParaRPr>
-                    </a:p>
-                  </a:txBody>
-                  <a:tcPr marL="9525" marR="9525" marT="9525" marB="0" anchor="b"/>
-                </a:tc>
-                <a:tc>
-                  <a:txBody>
-                    <a:bodyPr/>
-                    <a:lstStyle/>
-                    <a:p>
-                      <a:pPr marL="0" algn="ctr" defTabSz="914400" rtl="0" eaLnBrk="1" fontAlgn="b" latinLnBrk="0" hangingPunct="1">
-                        <a:buNone/>
-                      </a:pPr>
-                      <a:r>
-                        <a:rPr lang="it-IT" sz="1800" kern="1200" dirty="0">
-                          <a:solidFill>
-                            <a:schemeClr val="dk1"/>
-                          </a:solidFill>
-                          <a:latin typeface="+mn-lt"/>
-                          <a:ea typeface="+mn-ea"/>
-                          <a:cs typeface="+mn-cs"/>
-                        </a:rPr>
-                        <a:t>-0,177</a:t>
-                      </a:r>
-                    </a:p>
-                  </a:txBody>
-                  <a:tcPr marL="9525" marR="9525" marT="9525" marB="0" anchor="b"/>
-                </a:tc>
-                <a:extLst>
-                  <a:ext uri="{0D108BD9-81ED-4DB2-BD59-A6C34878D82A}">
-                    <a16:rowId xmlns:a16="http://schemas.microsoft.com/office/drawing/2014/main" val="2729321809"/>
-                  </a:ext>
-                </a:extLst>
-              </a:tr>
-              <a:tr h="345245">
-                <a:tc>
-                  <a:txBody>
-                    <a:bodyPr/>
-                    <a:lstStyle/>
-                    <a:p>
-                      <a:pPr algn="ctr"/>
-                      <a:r>
-                        <a:rPr lang="it-IT" dirty="0"/>
-                        <a:t>6</a:t>
-                      </a:r>
-                    </a:p>
-                  </a:txBody>
-                  <a:tcPr/>
-                </a:tc>
-                <a:tc>
-                  <a:txBody>
-                    <a:bodyPr/>
-                    <a:lstStyle/>
-                    <a:p>
-                      <a:pPr marL="0" algn="ctr" defTabSz="914400" rtl="0" eaLnBrk="1" fontAlgn="b" latinLnBrk="0" hangingPunct="1">
-                        <a:buNone/>
-                      </a:pPr>
-                      <a:r>
-                        <a:rPr lang="it-IT" sz="1800" kern="1200" dirty="0">
-                          <a:solidFill>
-                            <a:schemeClr val="dk1"/>
-                          </a:solidFill>
-                          <a:latin typeface="+mn-lt"/>
-                          <a:ea typeface="+mn-ea"/>
-                          <a:cs typeface="+mn-cs"/>
-                        </a:rPr>
-                        <a:t>10*min</a:t>
-                      </a:r>
-                    </a:p>
-                  </a:txBody>
-                  <a:tcPr marL="6350" marR="6350" marT="6350" marB="0" anchor="b"/>
-                </a:tc>
-                <a:tc>
-                  <a:txBody>
-                    <a:bodyPr/>
-                    <a:lstStyle/>
-                    <a:p>
-                      <a:pPr marL="0" algn="ctr" defTabSz="914400" rtl="0" eaLnBrk="1" fontAlgn="b" latinLnBrk="0" hangingPunct="1">
-                        <a:buNone/>
-                      </a:pPr>
-                      <a:r>
-                        <a:rPr lang="it-IT" sz="1800" kern="1200" dirty="0">
-                          <a:solidFill>
-                            <a:schemeClr val="dk1"/>
-                          </a:solidFill>
-                          <a:latin typeface="+mn-lt"/>
-                          <a:ea typeface="+mn-ea"/>
-                          <a:cs typeface="+mn-cs"/>
-                        </a:rPr>
-                        <a:t>-0,055</a:t>
-                      </a:r>
-                    </a:p>
-                  </a:txBody>
-                  <a:tcPr marL="9525" marR="9525" marT="9525" marB="0" anchor="b"/>
-                </a:tc>
-                <a:tc>
-                  <a:txBody>
-                    <a:bodyPr/>
-                    <a:lstStyle/>
-                    <a:p>
-                      <a:pPr marL="0" algn="ctr" defTabSz="914400" rtl="0" eaLnBrk="1" fontAlgn="b" latinLnBrk="0" hangingPunct="1">
-                        <a:buNone/>
-                      </a:pPr>
-                      <a:r>
-                        <a:rPr lang="it-IT" sz="1800" kern="1200" dirty="0">
-                          <a:solidFill>
-                            <a:schemeClr val="dk1"/>
-                          </a:solidFill>
-                          <a:latin typeface="+mn-lt"/>
-                          <a:ea typeface="+mn-ea"/>
-                          <a:cs typeface="+mn-cs"/>
-                        </a:rPr>
-                        <a:t>-0,067</a:t>
-                      </a:r>
-                    </a:p>
-                  </a:txBody>
-                  <a:tcPr marL="9525" marR="9525" marT="9525" marB="0" anchor="b"/>
-                </a:tc>
-                <a:tc>
-                  <a:txBody>
-                    <a:bodyPr/>
-                    <a:lstStyle/>
-                    <a:p>
-                      <a:pPr marL="0" algn="ctr" defTabSz="914400" rtl="0" eaLnBrk="1" fontAlgn="b" latinLnBrk="0" hangingPunct="1">
-                        <a:buNone/>
-                      </a:pPr>
-                      <a:endParaRPr lang="it-IT" sz="1800" kern="1200" dirty="0">
-                        <a:solidFill>
-                          <a:schemeClr val="dk1"/>
-                        </a:solidFill>
-                        <a:latin typeface="+mn-lt"/>
-                        <a:ea typeface="+mn-ea"/>
-                        <a:cs typeface="+mn-cs"/>
-                      </a:endParaRPr>
-                    </a:p>
-                  </a:txBody>
-                  <a:tcPr marL="9525" marR="9525" marT="9525" marB="0" anchor="b"/>
-                </a:tc>
-                <a:tc>
-                  <a:txBody>
-                    <a:bodyPr/>
-                    <a:lstStyle/>
-                    <a:p>
-                      <a:pPr marL="0" algn="ctr" defTabSz="914400" rtl="0" eaLnBrk="1" fontAlgn="b" latinLnBrk="0" hangingPunct="1">
-                        <a:buNone/>
-                      </a:pPr>
-                      <a:r>
-                        <a:rPr lang="it-IT" sz="1800" kern="1200" dirty="0">
-                          <a:solidFill>
-                            <a:schemeClr val="dk1"/>
-                          </a:solidFill>
-                          <a:latin typeface="+mn-lt"/>
-                          <a:ea typeface="+mn-ea"/>
-                          <a:cs typeface="+mn-cs"/>
-                        </a:rPr>
-                        <a:t>-0,085</a:t>
-                      </a:r>
-                    </a:p>
-                  </a:txBody>
-                  <a:tcPr marL="9525" marR="9525" marT="9525" marB="0" anchor="b"/>
-                </a:tc>
-                <a:extLst>
-                  <a:ext uri="{0D108BD9-81ED-4DB2-BD59-A6C34878D82A}">
-                    <a16:rowId xmlns:a16="http://schemas.microsoft.com/office/drawing/2014/main" val="4066702326"/>
-                  </a:ext>
-                </a:extLst>
-              </a:tr>
-              <a:tr h="345245">
-                <a:tc>
-                  <a:txBody>
-                    <a:bodyPr/>
-                    <a:lstStyle/>
-                    <a:p>
-                      <a:pPr algn="ctr"/>
-                      <a:r>
-                        <a:rPr lang="it-IT" dirty="0"/>
-                        <a:t>7</a:t>
-                      </a:r>
-                    </a:p>
-                  </a:txBody>
-                  <a:tcPr/>
-                </a:tc>
-                <a:tc>
-                  <a:txBody>
-                    <a:bodyPr/>
-                    <a:lstStyle/>
-                    <a:p>
-                      <a:pPr marL="0" algn="ctr" defTabSz="914400" rtl="0" eaLnBrk="1" fontAlgn="b" latinLnBrk="0" hangingPunct="1">
-                        <a:buNone/>
-                      </a:pPr>
-                      <a:r>
-                        <a:rPr lang="it-IT" sz="1800" kern="1200" dirty="0">
-                          <a:solidFill>
-                            <a:schemeClr val="dk1"/>
-                          </a:solidFill>
-                          <a:latin typeface="+mn-lt"/>
-                          <a:ea typeface="+mn-ea"/>
-                          <a:cs typeface="+mn-cs"/>
-                        </a:rPr>
-                        <a:t>5*min</a:t>
-                      </a:r>
-                    </a:p>
-                  </a:txBody>
-                  <a:tcPr marL="6350" marR="6350" marT="6350" marB="0" anchor="b"/>
-                </a:tc>
-                <a:tc>
-                  <a:txBody>
-                    <a:bodyPr/>
-                    <a:lstStyle/>
-                    <a:p>
-                      <a:pPr marL="0" algn="ctr" defTabSz="914400" rtl="0" eaLnBrk="1" fontAlgn="b" latinLnBrk="0" hangingPunct="1">
-                        <a:buNone/>
-                      </a:pPr>
-                      <a:r>
-                        <a:rPr lang="it-IT" sz="1800" kern="1200" dirty="0">
-                          <a:solidFill>
-                            <a:schemeClr val="dk1"/>
-                          </a:solidFill>
-                          <a:latin typeface="+mn-lt"/>
-                          <a:ea typeface="+mn-ea"/>
-                          <a:cs typeface="+mn-cs"/>
-                        </a:rPr>
-                        <a:t>0,035</a:t>
-                      </a:r>
-                    </a:p>
-                  </a:txBody>
-                  <a:tcPr marL="9525" marR="9525" marT="9525" marB="0" anchor="b"/>
-                </a:tc>
-                <a:tc>
-                  <a:txBody>
-                    <a:bodyPr/>
-                    <a:lstStyle/>
-                    <a:p>
-                      <a:pPr marL="0" algn="ctr" defTabSz="914400" rtl="0" eaLnBrk="1" fontAlgn="b" latinLnBrk="0" hangingPunct="1">
-                        <a:buNone/>
-                      </a:pPr>
-                      <a:r>
-                        <a:rPr lang="it-IT" sz="1800" kern="1200" dirty="0">
-                          <a:solidFill>
-                            <a:schemeClr val="dk1"/>
-                          </a:solidFill>
-                          <a:latin typeface="+mn-lt"/>
-                          <a:ea typeface="+mn-ea"/>
-                          <a:cs typeface="+mn-cs"/>
-                        </a:rPr>
-                        <a:t>-0,014</a:t>
-                      </a:r>
-                    </a:p>
-                  </a:txBody>
-                  <a:tcPr marL="9525" marR="9525" marT="9525" marB="0" anchor="b"/>
-                </a:tc>
-                <a:tc>
-                  <a:txBody>
-                    <a:bodyPr/>
-                    <a:lstStyle/>
-                    <a:p>
-                      <a:pPr marL="0" algn="ctr" defTabSz="914400" rtl="0" eaLnBrk="1" fontAlgn="b" latinLnBrk="0" hangingPunct="1">
-                        <a:buNone/>
-                      </a:pPr>
-                      <a:endParaRPr lang="it-IT" sz="1800" kern="1200" dirty="0">
-                        <a:solidFill>
-                          <a:schemeClr val="dk1"/>
-                        </a:solidFill>
-                        <a:latin typeface="+mn-lt"/>
-                        <a:ea typeface="+mn-ea"/>
-                        <a:cs typeface="+mn-cs"/>
-                      </a:endParaRPr>
-                    </a:p>
-                  </a:txBody>
-                  <a:tcPr marL="9525" marR="9525" marT="9525" marB="0" anchor="b"/>
-                </a:tc>
-                <a:tc>
-                  <a:txBody>
-                    <a:bodyPr/>
-                    <a:lstStyle/>
-                    <a:p>
-                      <a:pPr marL="0" algn="ctr" defTabSz="914400" rtl="0" eaLnBrk="1" fontAlgn="b" latinLnBrk="0" hangingPunct="1">
-                        <a:buNone/>
-                      </a:pPr>
-                      <a:r>
-                        <a:rPr lang="it-IT" sz="1800" kern="1200" dirty="0">
-                          <a:solidFill>
-                            <a:schemeClr val="dk1"/>
-                          </a:solidFill>
-                          <a:latin typeface="+mn-lt"/>
-                          <a:ea typeface="+mn-ea"/>
-                          <a:cs typeface="+mn-cs"/>
-                        </a:rPr>
-                        <a:t>0,003</a:t>
-                      </a:r>
-                    </a:p>
-                  </a:txBody>
-                  <a:tcPr marL="9525" marR="9525" marT="9525" marB="0" anchor="b"/>
-                </a:tc>
-                <a:extLst>
-                  <a:ext uri="{0D108BD9-81ED-4DB2-BD59-A6C34878D82A}">
-                    <a16:rowId xmlns:a16="http://schemas.microsoft.com/office/drawing/2014/main" val="2937315823"/>
-                  </a:ext>
-                </a:extLst>
-              </a:tr>
-              <a:tr h="345245">
-                <a:tc>
-                  <a:txBody>
-                    <a:bodyPr/>
-                    <a:lstStyle/>
-                    <a:p>
-                      <a:pPr algn="ctr"/>
-                      <a:r>
-                        <a:rPr lang="it-IT" dirty="0"/>
-                        <a:t>8</a:t>
-                      </a:r>
-                    </a:p>
-                  </a:txBody>
-                  <a:tcPr/>
-                </a:tc>
-                <a:tc>
-                  <a:txBody>
-                    <a:bodyPr/>
-                    <a:lstStyle/>
-                    <a:p>
-                      <a:pPr marL="0" algn="ctr" defTabSz="914400" rtl="0" eaLnBrk="1" fontAlgn="b" latinLnBrk="0" hangingPunct="1">
-                        <a:buNone/>
-                      </a:pPr>
-                      <a:r>
-                        <a:rPr lang="it-IT" sz="1800" kern="1200" dirty="0">
-                          <a:solidFill>
-                            <a:schemeClr val="dk1"/>
-                          </a:solidFill>
-                          <a:latin typeface="+mn-lt"/>
-                          <a:ea typeface="+mn-ea"/>
-                          <a:cs typeface="+mn-cs"/>
-                        </a:rPr>
-                        <a:t>3*min</a:t>
-                      </a:r>
-                    </a:p>
-                  </a:txBody>
-                  <a:tcPr marL="6350" marR="6350" marT="6350" marB="0" anchor="b"/>
-                </a:tc>
-                <a:tc>
-                  <a:txBody>
-                    <a:bodyPr/>
-                    <a:lstStyle/>
-                    <a:p>
-                      <a:pPr marL="0" algn="ctr" defTabSz="914400" rtl="0" eaLnBrk="1" fontAlgn="b" latinLnBrk="0" hangingPunct="1">
-                        <a:buNone/>
-                      </a:pPr>
-                      <a:r>
-                        <a:rPr lang="it-IT" sz="1800" kern="1200" dirty="0">
-                          <a:solidFill>
-                            <a:schemeClr val="dk1"/>
-                          </a:solidFill>
-                          <a:latin typeface="+mn-lt"/>
-                          <a:ea typeface="+mn-ea"/>
-                          <a:cs typeface="+mn-cs"/>
-                        </a:rPr>
-                        <a:t>0,015</a:t>
-                      </a:r>
-                    </a:p>
-                  </a:txBody>
-                  <a:tcPr marL="9525" marR="9525" marT="9525" marB="0" anchor="b"/>
-                </a:tc>
-                <a:tc>
-                  <a:txBody>
-                    <a:bodyPr/>
-                    <a:lstStyle/>
-                    <a:p>
-                      <a:pPr marL="0" algn="ctr" defTabSz="914400" rtl="0" eaLnBrk="1" fontAlgn="b" latinLnBrk="0" hangingPunct="1">
-                        <a:buNone/>
-                      </a:pPr>
-                      <a:r>
-                        <a:rPr lang="it-IT" sz="1800" kern="1200" dirty="0">
-                          <a:solidFill>
-                            <a:schemeClr val="dk1"/>
-                          </a:solidFill>
-                          <a:latin typeface="+mn-lt"/>
-                          <a:ea typeface="+mn-ea"/>
-                          <a:cs typeface="+mn-cs"/>
-                        </a:rPr>
-                        <a:t>-0,012</a:t>
-                      </a:r>
-                    </a:p>
-                  </a:txBody>
-                  <a:tcPr marL="9525" marR="9525" marT="9525" marB="0" anchor="b"/>
-                </a:tc>
-                <a:tc>
-                  <a:txBody>
-                    <a:bodyPr/>
-                    <a:lstStyle/>
-                    <a:p>
-                      <a:pPr marL="0" algn="ctr" defTabSz="914400" rtl="0" eaLnBrk="1" fontAlgn="b" latinLnBrk="0" hangingPunct="1">
-                        <a:buNone/>
-                      </a:pPr>
-                      <a:endParaRPr lang="it-IT" sz="1800" kern="1200" dirty="0">
-                        <a:solidFill>
-                          <a:schemeClr val="dk1"/>
-                        </a:solidFill>
-                        <a:latin typeface="+mn-lt"/>
-                        <a:ea typeface="+mn-ea"/>
-                        <a:cs typeface="+mn-cs"/>
-                      </a:endParaRPr>
-                    </a:p>
-                  </a:txBody>
-                  <a:tcPr marL="9525" marR="9525" marT="9525" marB="0" anchor="b"/>
-                </a:tc>
-                <a:tc>
-                  <a:txBody>
-                    <a:bodyPr/>
-                    <a:lstStyle/>
-                    <a:p>
-                      <a:pPr marL="0" algn="ctr" defTabSz="914400" rtl="0" eaLnBrk="1" fontAlgn="b" latinLnBrk="0" hangingPunct="1">
-                        <a:buNone/>
-                      </a:pPr>
-                      <a:r>
-                        <a:rPr lang="it-IT" sz="1800" kern="1200" dirty="0">
-                          <a:solidFill>
-                            <a:schemeClr val="dk1"/>
-                          </a:solidFill>
-                          <a:latin typeface="+mn-lt"/>
-                          <a:ea typeface="+mn-ea"/>
-                          <a:cs typeface="+mn-cs"/>
-                        </a:rPr>
-                        <a:t>0,007</a:t>
-                      </a:r>
-                    </a:p>
-                  </a:txBody>
-                  <a:tcPr marL="9525" marR="9525" marT="9525" marB="0" anchor="b"/>
-                </a:tc>
-                <a:extLst>
-                  <a:ext uri="{0D108BD9-81ED-4DB2-BD59-A6C34878D82A}">
-                    <a16:rowId xmlns:a16="http://schemas.microsoft.com/office/drawing/2014/main" val="2663528264"/>
-                  </a:ext>
-                </a:extLst>
-              </a:tr>
-              <a:tr h="345245">
-                <a:tc>
-                  <a:txBody>
-                    <a:bodyPr/>
-                    <a:lstStyle/>
-                    <a:p>
-                      <a:pPr algn="ctr"/>
-                      <a:r>
-                        <a:rPr lang="it-IT" dirty="0"/>
-                        <a:t>9</a:t>
-                      </a:r>
-                    </a:p>
-                  </a:txBody>
-                  <a:tcPr/>
-                </a:tc>
-                <a:tc>
-                  <a:txBody>
-                    <a:bodyPr/>
-                    <a:lstStyle/>
-                    <a:p>
-                      <a:pPr algn="ctr"/>
-                      <a:r>
-                        <a:rPr lang="it-IT" dirty="0"/>
-                        <a:t>Min</a:t>
-                      </a:r>
-                    </a:p>
-                  </a:txBody>
-                  <a:tcPr/>
-                </a:tc>
-                <a:tc>
-                  <a:txBody>
-                    <a:bodyPr/>
-                    <a:lstStyle/>
-                    <a:p>
-                      <a:pPr marL="0" algn="ctr" defTabSz="914400" rtl="0" eaLnBrk="1" fontAlgn="b" latinLnBrk="0" hangingPunct="1">
-                        <a:buNone/>
-                      </a:pPr>
-                      <a:r>
-                        <a:rPr lang="it-IT" sz="1800" kern="1200" dirty="0">
-                          <a:solidFill>
-                            <a:schemeClr val="dk1"/>
-                          </a:solidFill>
-                          <a:latin typeface="+mn-lt"/>
-                          <a:ea typeface="+mn-ea"/>
-                          <a:cs typeface="+mn-cs"/>
-                        </a:rPr>
-                        <a:t>0,016</a:t>
-                      </a:r>
-                    </a:p>
-                  </a:txBody>
-                  <a:tcPr marL="9525" marR="9525" marT="9525" marB="0" anchor="b"/>
-                </a:tc>
-                <a:tc>
-                  <a:txBody>
-                    <a:bodyPr/>
-                    <a:lstStyle/>
-                    <a:p>
-                      <a:pPr marL="0" algn="ctr" defTabSz="914400" rtl="0" eaLnBrk="1" fontAlgn="b" latinLnBrk="0" hangingPunct="1">
-                        <a:buNone/>
-                      </a:pPr>
-                      <a:r>
-                        <a:rPr lang="it-IT" sz="1800" kern="1200" dirty="0">
-                          <a:solidFill>
-                            <a:schemeClr val="dk1"/>
-                          </a:solidFill>
-                          <a:latin typeface="+mn-lt"/>
-                          <a:ea typeface="+mn-ea"/>
-                          <a:cs typeface="+mn-cs"/>
-                        </a:rPr>
-                        <a:t>0,016</a:t>
-                      </a:r>
-                    </a:p>
-                  </a:txBody>
-                  <a:tcPr marL="9525" marR="9525" marT="9525" marB="0" anchor="b"/>
-                </a:tc>
-                <a:tc>
-                  <a:txBody>
-                    <a:bodyPr/>
-                    <a:lstStyle/>
-                    <a:p>
-                      <a:pPr marL="0" algn="ctr" defTabSz="914400" rtl="0" eaLnBrk="1" fontAlgn="b" latinLnBrk="0" hangingPunct="1">
-                        <a:buNone/>
-                      </a:pPr>
-                      <a:endParaRPr lang="it-IT" sz="1800" kern="1200" dirty="0">
-                        <a:solidFill>
-                          <a:schemeClr val="dk1"/>
-                        </a:solidFill>
-                        <a:latin typeface="+mn-lt"/>
-                        <a:ea typeface="+mn-ea"/>
-                        <a:cs typeface="+mn-cs"/>
-                      </a:endParaRPr>
-                    </a:p>
-                  </a:txBody>
-                  <a:tcPr marL="9525" marR="9525" marT="9525" marB="0" anchor="b"/>
-                </a:tc>
-                <a:tc>
-                  <a:txBody>
-                    <a:bodyPr/>
-                    <a:lstStyle/>
-                    <a:p>
-                      <a:pPr marL="0" algn="ctr" defTabSz="914400" rtl="0" eaLnBrk="1" fontAlgn="b" latinLnBrk="0" hangingPunct="1">
-                        <a:buNone/>
-                      </a:pPr>
-                      <a:r>
-                        <a:rPr lang="it-IT" sz="1800" kern="1200" dirty="0">
-                          <a:solidFill>
-                            <a:schemeClr val="dk1"/>
-                          </a:solidFill>
-                          <a:latin typeface="+mn-lt"/>
-                          <a:ea typeface="+mn-ea"/>
-                          <a:cs typeface="+mn-cs"/>
-                        </a:rPr>
-                        <a:t>-0,024</a:t>
-                      </a:r>
-                    </a:p>
-                  </a:txBody>
-                  <a:tcPr marL="9525" marR="9525" marT="9525" marB="0" anchor="b"/>
-                </a:tc>
-                <a:extLst>
-                  <a:ext uri="{0D108BD9-81ED-4DB2-BD59-A6C34878D82A}">
-                    <a16:rowId xmlns:a16="http://schemas.microsoft.com/office/drawing/2014/main" val="3321969834"/>
-                  </a:ext>
-                </a:extLst>
-              </a:tr>
-            </a:tbl>
-          </a:graphicData>
-        </a:graphic>
-      </p:graphicFrame>
+          <p:cNvPicPr>
+            <a:picLocks noChangeAspect="1"/>
+          </p:cNvPicPr>
+          <p:nvPr/>
+        </p:nvPicPr>
+        <p:blipFill>
+          <a:blip r:embed="rId2"/>
+          <a:stretch>
+            <a:fillRect/>
+          </a:stretch>
+        </p:blipFill>
+        <p:spPr>
+          <a:xfrm>
+            <a:off x="642864" y="1988313"/>
+            <a:ext cx="7353861" cy="3427750"/>
+          </a:xfrm>
+          <a:prstGeom prst="rect">
+            <a:avLst/>
+          </a:prstGeom>
+        </p:spPr>
+      </p:pic>
+      <p:pic>
+        <p:nvPicPr>
+          <p:cNvPr id="7" name="Immagine 6">
+            <a:extLst>
+              <a:ext uri="{FF2B5EF4-FFF2-40B4-BE49-F238E27FC236}">
+                <a16:creationId xmlns:a16="http://schemas.microsoft.com/office/drawing/2014/main" id="{3A062DE6-3FEB-04EA-B89D-94D72DFE4405}"/>
+              </a:ext>
+            </a:extLst>
+          </p:cNvPr>
+          <p:cNvPicPr>
+            <a:picLocks noChangeAspect="1"/>
+          </p:cNvPicPr>
+          <p:nvPr/>
+        </p:nvPicPr>
+        <p:blipFill>
+          <a:blip r:embed="rId3"/>
+          <a:stretch>
+            <a:fillRect/>
+          </a:stretch>
+        </p:blipFill>
+        <p:spPr>
+          <a:xfrm>
+            <a:off x="9107110" y="1988313"/>
+            <a:ext cx="1979990" cy="2428942"/>
+          </a:xfrm>
+          <a:prstGeom prst="rect">
+            <a:avLst/>
+          </a:prstGeom>
+        </p:spPr>
+      </p:pic>
     </p:spTree>
     <p:extLst>
       <p:ext uri="{BB962C8B-B14F-4D97-AF65-F5344CB8AC3E}">
         <p14:creationId xmlns:p14="http://schemas.microsoft.com/office/powerpoint/2010/main" val="4043401133"/>
+      </p:ext>
+    </p:extLst>
+  </p:cSld>
+  <p:clrMapOvr>
+    <a:masterClrMapping/>
+  </p:clrMapOvr>
+</p:sld>
+</file>
+
+<file path=ppt/slides/slide9.xml><?xml version="1.0" encoding="utf-8"?>
+<p:sld xmlns:a="http://schemas.openxmlformats.org/drawingml/2006/main" xmlns:r="http://schemas.openxmlformats.org/officeDocument/2006/relationships" xmlns:p="http://schemas.openxmlformats.org/presentationml/2006/main">
+  <p:cSld>
+    <p:spTree>
+      <p:nvGrpSpPr>
+        <p:cNvPr id="1" name=""/>
+        <p:cNvGrpSpPr/>
+        <p:nvPr/>
+      </p:nvGrpSpPr>
+      <p:grpSpPr>
+        <a:xfrm>
+          <a:off x="0" y="0"/>
+          <a:ext cx="0" cy="0"/>
+          <a:chOff x="0" y="0"/>
+          <a:chExt cx="0" cy="0"/>
+        </a:xfrm>
+      </p:grpSpPr>
+      <p:sp>
+        <p:nvSpPr>
+          <p:cNvPr id="2" name="Titolo 1">
+            <a:extLst>
+              <a:ext uri="{FF2B5EF4-FFF2-40B4-BE49-F238E27FC236}">
+                <a16:creationId xmlns:a16="http://schemas.microsoft.com/office/drawing/2014/main" id="{603A5762-7F8C-6376-2AF4-2338831D87D1}"/>
+              </a:ext>
+            </a:extLst>
+          </p:cNvPr>
+          <p:cNvSpPr>
+            <a:spLocks noGrp="1"/>
+          </p:cNvSpPr>
+          <p:nvPr>
+            <p:ph type="title"/>
+          </p:nvPr>
+        </p:nvSpPr>
+        <p:spPr/>
+        <p:txBody>
+          <a:bodyPr/>
+          <a:lstStyle/>
+          <a:p>
+            <a:r>
+              <a:rPr lang="it-IT" dirty="0"/>
+              <a:t>Primo Feedback</a:t>
+            </a:r>
+          </a:p>
+        </p:txBody>
+      </p:sp>
+      <p:sp>
+        <p:nvSpPr>
+          <p:cNvPr id="3" name="Segnaposto numero diapositiva 2">
+            <a:extLst>
+              <a:ext uri="{FF2B5EF4-FFF2-40B4-BE49-F238E27FC236}">
+                <a16:creationId xmlns:a16="http://schemas.microsoft.com/office/drawing/2014/main" id="{0D023E5B-AB58-D6DD-9870-5FB5BE85F247}"/>
+              </a:ext>
+            </a:extLst>
+          </p:cNvPr>
+          <p:cNvSpPr>
+            <a:spLocks noGrp="1"/>
+          </p:cNvSpPr>
+          <p:nvPr>
+            <p:ph type="sldNum" sz="quarter" idx="12"/>
+          </p:nvPr>
+        </p:nvSpPr>
+        <p:spPr/>
+        <p:txBody>
+          <a:bodyPr/>
+          <a:lstStyle/>
+          <a:p>
+            <a:fld id="{D52F2E17-486B-469A-8A18-48E5804D6F3A}" type="slidenum">
+              <a:rPr lang="it-IT" smtClean="0"/>
+              <a:t>9</a:t>
+            </a:fld>
+            <a:endParaRPr lang="it-IT"/>
+          </a:p>
+        </p:txBody>
+      </p:sp>
+      <p:sp>
+        <p:nvSpPr>
+          <p:cNvPr id="5" name="CasellaDiTesto 4">
+            <a:extLst>
+              <a:ext uri="{FF2B5EF4-FFF2-40B4-BE49-F238E27FC236}">
+                <a16:creationId xmlns:a16="http://schemas.microsoft.com/office/drawing/2014/main" id="{A8A01F9E-F570-9F8F-F146-2871CAFD5978}"/>
+              </a:ext>
+            </a:extLst>
+          </p:cNvPr>
+          <p:cNvSpPr txBox="1"/>
+          <p:nvPr/>
+        </p:nvSpPr>
+        <p:spPr>
+          <a:xfrm>
+            <a:off x="984739" y="1814732"/>
+            <a:ext cx="9917723" cy="2585323"/>
+          </a:xfrm>
+          <a:prstGeom prst="rect">
+            <a:avLst/>
+          </a:prstGeom>
+          <a:noFill/>
+        </p:spPr>
+        <p:txBody>
+          <a:bodyPr wrap="square" rtlCol="0">
+            <a:spAutoFit/>
+          </a:bodyPr>
+          <a:lstStyle/>
+          <a:p>
+            <a:pPr marL="285750" indent="-285750">
+              <a:buFont typeface="Wingdings" panose="05000000000000000000" pitchFamily="2" charset="2"/>
+              <a:buChar char="Ø"/>
+            </a:pPr>
+            <a:r>
+              <a:rPr lang="it-IT" dirty="0"/>
+              <a:t>Sembra che la rete ora sia una retta con un solo input (la portata) addestrata sui 9 punti di un solo dispositivo, quindi non può generalizzare ad altri sensori e l'errore non è lineare. Se cosi è, </a:t>
+            </a:r>
+          </a:p>
+          <a:p>
+            <a:pPr marL="742950" lvl="1" indent="-285750">
+              <a:buFont typeface="Wingdings" panose="05000000000000000000" pitchFamily="2" charset="2"/>
+              <a:buChar char="q"/>
+            </a:pPr>
+            <a:r>
+              <a:rPr lang="it-IT" dirty="0"/>
+              <a:t>Si suggerisce di usare come input gli errori misurati nei punti veloci (max, 0.7·max, 0.4·max) e come output quelli dei punti lenti (10·min, 5·min, 3·min, min), che sono quelli che costano più tempo. </a:t>
+            </a:r>
+          </a:p>
+          <a:p>
+            <a:pPr marL="742950" lvl="1" indent="-285750">
+              <a:buFont typeface="Wingdings" panose="05000000000000000000" pitchFamily="2" charset="2"/>
+              <a:buChar char="Ø"/>
+            </a:pPr>
+            <a:endParaRPr lang="it-IT" dirty="0"/>
+          </a:p>
+          <a:p>
+            <a:pPr marL="285750" indent="-285750">
+              <a:buFont typeface="Wingdings" panose="05000000000000000000" pitchFamily="2" charset="2"/>
+              <a:buChar char="Ø"/>
+            </a:pPr>
+            <a:r>
+              <a:rPr lang="it-IT" dirty="0"/>
+              <a:t>Serve poi una divisione </a:t>
+            </a:r>
+            <a:r>
+              <a:rPr lang="it-IT" dirty="0" err="1"/>
+              <a:t>train</a:t>
+            </a:r>
+            <a:r>
+              <a:rPr lang="it-IT" dirty="0"/>
+              <a:t>/test per dispositivo </a:t>
+            </a:r>
+          </a:p>
+          <a:p>
+            <a:pPr marL="285750" indent="-285750">
+              <a:buFont typeface="Wingdings" panose="05000000000000000000" pitchFamily="2" charset="2"/>
+              <a:buChar char="Ø"/>
+            </a:pPr>
+            <a:endParaRPr lang="it-IT" dirty="0"/>
+          </a:p>
+          <a:p>
+            <a:pPr marL="285750" indent="-285750">
+              <a:buFont typeface="Wingdings" panose="05000000000000000000" pitchFamily="2" charset="2"/>
+              <a:buChar char="Ø"/>
+            </a:pPr>
+            <a:r>
+              <a:rPr lang="it-IT" dirty="0"/>
+              <a:t>e un confronto con un baseline semplice, come una regressione lineare multipla.</a:t>
+            </a:r>
+          </a:p>
+        </p:txBody>
+      </p:sp>
+    </p:spTree>
+    <p:extLst>
+      <p:ext uri="{BB962C8B-B14F-4D97-AF65-F5344CB8AC3E}">
+        <p14:creationId xmlns:p14="http://schemas.microsoft.com/office/powerpoint/2010/main" val="1050283076"/>
       </p:ext>
     </p:extLst>
   </p:cSld>

--- a/scuola2026.pptx
+++ b/scuola2026.pptx
@@ -5,7 +5,7 @@
     <p:sldMasterId id="2147483648" r:id="rId1"/>
   </p:sldMasterIdLst>
   <p:notesMasterIdLst>
-    <p:notesMasterId r:id="rId12"/>
+    <p:notesMasterId r:id="rId16"/>
   </p:notesMasterIdLst>
   <p:sldIdLst>
     <p:sldId id="271" r:id="rId2"/>
@@ -16,8 +16,12 @@
     <p:sldId id="269" r:id="rId7"/>
     <p:sldId id="262" r:id="rId8"/>
     <p:sldId id="268" r:id="rId9"/>
-    <p:sldId id="273" r:id="rId10"/>
-    <p:sldId id="274" r:id="rId11"/>
+    <p:sldId id="276" r:id="rId10"/>
+    <p:sldId id="277" r:id="rId11"/>
+    <p:sldId id="278" r:id="rId12"/>
+    <p:sldId id="275" r:id="rId13"/>
+    <p:sldId id="273" r:id="rId14"/>
+    <p:sldId id="274" r:id="rId15"/>
   </p:sldIdLst>
   <p:sldSz cx="12192000" cy="6858000"/>
   <p:notesSz cx="6858000" cy="9144000"/>
@@ -206,7 +210,7 @@
           <a:p>
             <a:fld id="{FD99C88B-43CB-465C-AC07-4A1603544EEF}" type="datetimeFigureOut">
               <a:rPr lang="it-IT" smtClean="0"/>
-              <a:t>22/10/2026</a:t>
+              <a:t>23/10/2026</a:t>
             </a:fld>
             <a:endParaRPr lang="it-IT"/>
           </a:p>
@@ -620,7 +624,7 @@
           <a:p>
             <a:fld id="{0EC8B29D-1AA2-4955-B4ED-3C2E8AB5E7B7}" type="datetime1">
               <a:rPr lang="it-IT" smtClean="0"/>
-              <a:t>22/10/2026</a:t>
+              <a:t>23/10/2026</a:t>
             </a:fld>
             <a:endParaRPr lang="it-IT"/>
           </a:p>
@@ -818,7 +822,7 @@
           <a:p>
             <a:fld id="{1CCCACE1-107B-4423-92E6-9CBAEDFF39D7}" type="datetime1">
               <a:rPr lang="it-IT" smtClean="0"/>
-              <a:t>22/10/2026</a:t>
+              <a:t>23/10/2026</a:t>
             </a:fld>
             <a:endParaRPr lang="it-IT"/>
           </a:p>
@@ -1026,7 +1030,7 @@
           <a:p>
             <a:fld id="{75510862-D03A-40AF-9459-483BB5FF88A0}" type="datetime1">
               <a:rPr lang="it-IT" smtClean="0"/>
-              <a:t>22/10/2026</a:t>
+              <a:t>23/10/2026</a:t>
             </a:fld>
             <a:endParaRPr lang="it-IT"/>
           </a:p>
@@ -1224,7 +1228,7 @@
           <a:p>
             <a:fld id="{B98E00E7-A727-43FD-805E-9224E6BDAC3D}" type="datetime1">
               <a:rPr lang="it-IT" smtClean="0"/>
-              <a:t>22/10/2026</a:t>
+              <a:t>23/10/2026</a:t>
             </a:fld>
             <a:endParaRPr lang="it-IT"/>
           </a:p>
@@ -1499,7 +1503,7 @@
           <a:p>
             <a:fld id="{514C4067-742A-42A1-8FF7-649EBE7507D9}" type="datetime1">
               <a:rPr lang="it-IT" smtClean="0"/>
-              <a:t>22/10/2026</a:t>
+              <a:t>23/10/2026</a:t>
             </a:fld>
             <a:endParaRPr lang="it-IT"/>
           </a:p>
@@ -1764,7 +1768,7 @@
           <a:p>
             <a:fld id="{3F7F8174-8BD3-4C8F-B89C-BBC56B3549A3}" type="datetime1">
               <a:rPr lang="it-IT" smtClean="0"/>
-              <a:t>22/10/2026</a:t>
+              <a:t>23/10/2026</a:t>
             </a:fld>
             <a:endParaRPr lang="it-IT"/>
           </a:p>
@@ -2176,7 +2180,7 @@
           <a:p>
             <a:fld id="{C692EF37-6EB9-49E1-90A9-32373D7F613F}" type="datetime1">
               <a:rPr lang="it-IT" smtClean="0"/>
-              <a:t>22/10/2026</a:t>
+              <a:t>23/10/2026</a:t>
             </a:fld>
             <a:endParaRPr lang="it-IT"/>
           </a:p>
@@ -2317,7 +2321,7 @@
           <a:p>
             <a:fld id="{A47C857E-7037-42F5-A0E6-F1969B575D7B}" type="datetime1">
               <a:rPr lang="it-IT" smtClean="0"/>
-              <a:t>22/10/2026</a:t>
+              <a:t>23/10/2026</a:t>
             </a:fld>
             <a:endParaRPr lang="it-IT"/>
           </a:p>
@@ -2430,7 +2434,7 @@
           <a:p>
             <a:fld id="{B52F5AFB-FDAE-4C9F-B46D-E5D396222373}" type="datetime1">
               <a:rPr lang="it-IT" smtClean="0"/>
-              <a:t>22/10/2026</a:t>
+              <a:t>23/10/2026</a:t>
             </a:fld>
             <a:endParaRPr lang="it-IT"/>
           </a:p>
@@ -2741,7 +2745,7 @@
           <a:p>
             <a:fld id="{910E922E-C5D3-4048-ACF7-E68149FEBE18}" type="datetime1">
               <a:rPr lang="it-IT" smtClean="0"/>
-              <a:t>22/10/2026</a:t>
+              <a:t>23/10/2026</a:t>
             </a:fld>
             <a:endParaRPr lang="it-IT"/>
           </a:p>
@@ -3029,7 +3033,7 @@
           <a:p>
             <a:fld id="{FF9285D8-E0DE-4CB7-82BB-0755DF6B59D1}" type="datetime1">
               <a:rPr lang="it-IT" smtClean="0"/>
-              <a:t>22/10/2026</a:t>
+              <a:t>23/10/2026</a:t>
             </a:fld>
             <a:endParaRPr lang="it-IT"/>
           </a:p>
@@ -3270,7 +3274,7 @@
           <a:p>
             <a:fld id="{07C2A574-841A-40BA-ACD5-BD495618AB66}" type="datetime1">
               <a:rPr lang="it-IT" smtClean="0"/>
-              <a:t>22/10/2026</a:t>
+              <a:t>23/10/2026</a:t>
             </a:fld>
             <a:endParaRPr lang="it-IT"/>
           </a:p>
@@ -3815,6 +3819,577 @@
           <p:cNvPr id="2" name="Titolo 1">
             <a:extLst>
               <a:ext uri="{FF2B5EF4-FFF2-40B4-BE49-F238E27FC236}">
+                <a16:creationId xmlns:a16="http://schemas.microsoft.com/office/drawing/2014/main" id="{D9E2D195-8F4B-4AD6-3525-F4672E7BBDFF}"/>
+              </a:ext>
+            </a:extLst>
+          </p:cNvPr>
+          <p:cNvSpPr>
+            <a:spLocks noGrp="1"/>
+          </p:cNvSpPr>
+          <p:nvPr>
+            <p:ph type="title"/>
+          </p:nvPr>
+        </p:nvSpPr>
+        <p:spPr/>
+        <p:txBody>
+          <a:bodyPr/>
+          <a:lstStyle/>
+          <a:p>
+            <a:r>
+              <a:rPr lang="it-IT" dirty="0"/>
+              <a:t>Training Loop</a:t>
+            </a:r>
+          </a:p>
+        </p:txBody>
+      </p:sp>
+      <p:sp>
+        <p:nvSpPr>
+          <p:cNvPr id="3" name="Segnaposto numero diapositiva 2">
+            <a:extLst>
+              <a:ext uri="{FF2B5EF4-FFF2-40B4-BE49-F238E27FC236}">
+                <a16:creationId xmlns:a16="http://schemas.microsoft.com/office/drawing/2014/main" id="{AE2C321B-9524-04D8-E59A-0432B132A1BC}"/>
+              </a:ext>
+            </a:extLst>
+          </p:cNvPr>
+          <p:cNvSpPr>
+            <a:spLocks noGrp="1"/>
+          </p:cNvSpPr>
+          <p:nvPr>
+            <p:ph type="sldNum" sz="quarter" idx="12"/>
+          </p:nvPr>
+        </p:nvSpPr>
+        <p:spPr/>
+        <p:txBody>
+          <a:bodyPr/>
+          <a:lstStyle/>
+          <a:p>
+            <a:fld id="{D52F2E17-486B-469A-8A18-48E5804D6F3A}" type="slidenum">
+              <a:rPr lang="it-IT" smtClean="0"/>
+              <a:t>10</a:t>
+            </a:fld>
+            <a:endParaRPr lang="it-IT"/>
+          </a:p>
+        </p:txBody>
+      </p:sp>
+      <p:pic>
+        <p:nvPicPr>
+          <p:cNvPr id="5" name="Immagine 4">
+            <a:extLst>
+              <a:ext uri="{FF2B5EF4-FFF2-40B4-BE49-F238E27FC236}">
+                <a16:creationId xmlns:a16="http://schemas.microsoft.com/office/drawing/2014/main" id="{80E8E1A1-351E-A696-016E-F95C5EEF1612}"/>
+              </a:ext>
+            </a:extLst>
+          </p:cNvPr>
+          <p:cNvPicPr>
+            <a:picLocks noChangeAspect="1"/>
+          </p:cNvPicPr>
+          <p:nvPr/>
+        </p:nvPicPr>
+        <p:blipFill>
+          <a:blip r:embed="rId2"/>
+          <a:stretch>
+            <a:fillRect/>
+          </a:stretch>
+        </p:blipFill>
+        <p:spPr>
+          <a:xfrm>
+            <a:off x="6721622" y="2162510"/>
+            <a:ext cx="4399387" cy="2532980"/>
+          </a:xfrm>
+          <a:prstGeom prst="rect">
+            <a:avLst/>
+          </a:prstGeom>
+        </p:spPr>
+      </p:pic>
+      <p:pic>
+        <p:nvPicPr>
+          <p:cNvPr id="7" name="Immagine 6">
+            <a:extLst>
+              <a:ext uri="{FF2B5EF4-FFF2-40B4-BE49-F238E27FC236}">
+                <a16:creationId xmlns:a16="http://schemas.microsoft.com/office/drawing/2014/main" id="{4B2858B6-8D79-C2B7-AC9D-414F1F10CE55}"/>
+              </a:ext>
+            </a:extLst>
+          </p:cNvPr>
+          <p:cNvPicPr>
+            <a:picLocks noChangeAspect="1"/>
+          </p:cNvPicPr>
+          <p:nvPr/>
+        </p:nvPicPr>
+        <p:blipFill>
+          <a:blip r:embed="rId3"/>
+          <a:stretch>
+            <a:fillRect/>
+          </a:stretch>
+        </p:blipFill>
+        <p:spPr>
+          <a:xfrm>
+            <a:off x="1241279" y="1690688"/>
+            <a:ext cx="4229100" cy="3933825"/>
+          </a:xfrm>
+          <a:prstGeom prst="rect">
+            <a:avLst/>
+          </a:prstGeom>
+        </p:spPr>
+      </p:pic>
+    </p:spTree>
+    <p:extLst>
+      <p:ext uri="{BB962C8B-B14F-4D97-AF65-F5344CB8AC3E}">
+        <p14:creationId xmlns:p14="http://schemas.microsoft.com/office/powerpoint/2010/main" val="1714073893"/>
+      </p:ext>
+    </p:extLst>
+  </p:cSld>
+  <p:clrMapOvr>
+    <a:masterClrMapping/>
+  </p:clrMapOvr>
+</p:sld>
+</file>
+
+<file path=ppt/slides/slide11.xml><?xml version="1.0" encoding="utf-8"?>
+<p:sld xmlns:a="http://schemas.openxmlformats.org/drawingml/2006/main" xmlns:r="http://schemas.openxmlformats.org/officeDocument/2006/relationships" xmlns:p="http://schemas.openxmlformats.org/presentationml/2006/main">
+  <p:cSld>
+    <p:spTree>
+      <p:nvGrpSpPr>
+        <p:cNvPr id="1" name=""/>
+        <p:cNvGrpSpPr/>
+        <p:nvPr/>
+      </p:nvGrpSpPr>
+      <p:grpSpPr>
+        <a:xfrm>
+          <a:off x="0" y="0"/>
+          <a:ext cx="0" cy="0"/>
+          <a:chOff x="0" y="0"/>
+          <a:chExt cx="0" cy="0"/>
+        </a:xfrm>
+      </p:grpSpPr>
+      <p:sp>
+        <p:nvSpPr>
+          <p:cNvPr id="2" name="Titolo 1">
+            <a:extLst>
+              <a:ext uri="{FF2B5EF4-FFF2-40B4-BE49-F238E27FC236}">
+                <a16:creationId xmlns:a16="http://schemas.microsoft.com/office/drawing/2014/main" id="{1075B643-1849-EB75-9886-166A1CD8E4CF}"/>
+              </a:ext>
+            </a:extLst>
+          </p:cNvPr>
+          <p:cNvSpPr>
+            <a:spLocks noGrp="1"/>
+          </p:cNvSpPr>
+          <p:nvPr>
+            <p:ph type="title"/>
+          </p:nvPr>
+        </p:nvSpPr>
+        <p:spPr/>
+        <p:txBody>
+          <a:bodyPr/>
+          <a:lstStyle/>
+          <a:p>
+            <a:r>
+              <a:rPr lang="it-IT" dirty="0" err="1"/>
+              <a:t>Result</a:t>
+            </a:r>
+            <a:r>
+              <a:rPr lang="it-IT" dirty="0"/>
+              <a:t> after Training</a:t>
+            </a:r>
+          </a:p>
+        </p:txBody>
+      </p:sp>
+      <p:sp>
+        <p:nvSpPr>
+          <p:cNvPr id="3" name="Segnaposto numero diapositiva 2">
+            <a:extLst>
+              <a:ext uri="{FF2B5EF4-FFF2-40B4-BE49-F238E27FC236}">
+                <a16:creationId xmlns:a16="http://schemas.microsoft.com/office/drawing/2014/main" id="{375356A5-770D-E45A-3553-E8FE4E4AD075}"/>
+              </a:ext>
+            </a:extLst>
+          </p:cNvPr>
+          <p:cNvSpPr>
+            <a:spLocks noGrp="1"/>
+          </p:cNvSpPr>
+          <p:nvPr>
+            <p:ph type="sldNum" sz="quarter" idx="12"/>
+          </p:nvPr>
+        </p:nvSpPr>
+        <p:spPr/>
+        <p:txBody>
+          <a:bodyPr/>
+          <a:lstStyle/>
+          <a:p>
+            <a:fld id="{D52F2E17-486B-469A-8A18-48E5804D6F3A}" type="slidenum">
+              <a:rPr lang="it-IT" smtClean="0"/>
+              <a:t>11</a:t>
+            </a:fld>
+            <a:endParaRPr lang="it-IT"/>
+          </a:p>
+        </p:txBody>
+      </p:sp>
+      <p:pic>
+        <p:nvPicPr>
+          <p:cNvPr id="5" name="Immagine 4">
+            <a:extLst>
+              <a:ext uri="{FF2B5EF4-FFF2-40B4-BE49-F238E27FC236}">
+                <a16:creationId xmlns:a16="http://schemas.microsoft.com/office/drawing/2014/main" id="{8155D79A-4AAA-EF17-E027-D4344857361F}"/>
+              </a:ext>
+            </a:extLst>
+          </p:cNvPr>
+          <p:cNvPicPr>
+            <a:picLocks noChangeAspect="1"/>
+          </p:cNvPicPr>
+          <p:nvPr/>
+        </p:nvPicPr>
+        <p:blipFill>
+          <a:blip r:embed="rId2"/>
+          <a:stretch>
+            <a:fillRect/>
+          </a:stretch>
+        </p:blipFill>
+        <p:spPr>
+          <a:xfrm>
+            <a:off x="3414712" y="1690688"/>
+            <a:ext cx="5362575" cy="4152900"/>
+          </a:xfrm>
+          <a:prstGeom prst="rect">
+            <a:avLst/>
+          </a:prstGeom>
+        </p:spPr>
+      </p:pic>
+    </p:spTree>
+    <p:extLst>
+      <p:ext uri="{BB962C8B-B14F-4D97-AF65-F5344CB8AC3E}">
+        <p14:creationId xmlns:p14="http://schemas.microsoft.com/office/powerpoint/2010/main" val="2156550853"/>
+      </p:ext>
+    </p:extLst>
+  </p:cSld>
+  <p:clrMapOvr>
+    <a:masterClrMapping/>
+  </p:clrMapOvr>
+</p:sld>
+</file>
+
+<file path=ppt/slides/slide12.xml><?xml version="1.0" encoding="utf-8"?>
+<p:sld xmlns:a="http://schemas.openxmlformats.org/drawingml/2006/main" xmlns:r="http://schemas.openxmlformats.org/officeDocument/2006/relationships" xmlns:p="http://schemas.openxmlformats.org/presentationml/2006/main">
+  <p:cSld>
+    <p:spTree>
+      <p:nvGrpSpPr>
+        <p:cNvPr id="1" name=""/>
+        <p:cNvGrpSpPr/>
+        <p:nvPr/>
+      </p:nvGrpSpPr>
+      <p:grpSpPr>
+        <a:xfrm>
+          <a:off x="0" y="0"/>
+          <a:ext cx="0" cy="0"/>
+          <a:chOff x="0" y="0"/>
+          <a:chExt cx="0" cy="0"/>
+        </a:xfrm>
+      </p:grpSpPr>
+      <p:sp>
+        <p:nvSpPr>
+          <p:cNvPr id="2" name="Titolo 1">
+            <a:extLst>
+              <a:ext uri="{FF2B5EF4-FFF2-40B4-BE49-F238E27FC236}">
+                <a16:creationId xmlns:a16="http://schemas.microsoft.com/office/drawing/2014/main" id="{1D8DF75B-55BD-9266-AC17-57C980EE042B}"/>
+              </a:ext>
+            </a:extLst>
+          </p:cNvPr>
+          <p:cNvSpPr>
+            <a:spLocks noGrp="1"/>
+          </p:cNvSpPr>
+          <p:nvPr>
+            <p:ph type="title"/>
+          </p:nvPr>
+        </p:nvSpPr>
+        <p:spPr/>
+        <p:txBody>
+          <a:bodyPr/>
+          <a:lstStyle/>
+          <a:p>
+            <a:r>
+              <a:rPr lang="it-IT" dirty="0"/>
+              <a:t>Data to </a:t>
+            </a:r>
+            <a:r>
+              <a:rPr lang="it-IT" dirty="0" err="1"/>
+              <a:t>Tensors</a:t>
+            </a:r>
+            <a:r>
+              <a:rPr lang="it-IT" dirty="0"/>
+              <a:t> Conversion</a:t>
+            </a:r>
+          </a:p>
+        </p:txBody>
+      </p:sp>
+      <p:sp>
+        <p:nvSpPr>
+          <p:cNvPr id="3" name="Segnaposto numero diapositiva 2">
+            <a:extLst>
+              <a:ext uri="{FF2B5EF4-FFF2-40B4-BE49-F238E27FC236}">
+                <a16:creationId xmlns:a16="http://schemas.microsoft.com/office/drawing/2014/main" id="{E0B10DEC-85AC-A916-653B-619F576BC463}"/>
+              </a:ext>
+            </a:extLst>
+          </p:cNvPr>
+          <p:cNvSpPr>
+            <a:spLocks noGrp="1"/>
+          </p:cNvSpPr>
+          <p:nvPr>
+            <p:ph type="sldNum" sz="quarter" idx="12"/>
+          </p:nvPr>
+        </p:nvSpPr>
+        <p:spPr/>
+        <p:txBody>
+          <a:bodyPr/>
+          <a:lstStyle/>
+          <a:p>
+            <a:fld id="{D52F2E17-486B-469A-8A18-48E5804D6F3A}" type="slidenum">
+              <a:rPr lang="it-IT" smtClean="0"/>
+              <a:t>12</a:t>
+            </a:fld>
+            <a:endParaRPr lang="it-IT"/>
+          </a:p>
+        </p:txBody>
+      </p:sp>
+      <p:pic>
+        <p:nvPicPr>
+          <p:cNvPr id="5" name="Immagine 4">
+            <a:extLst>
+              <a:ext uri="{FF2B5EF4-FFF2-40B4-BE49-F238E27FC236}">
+                <a16:creationId xmlns:a16="http://schemas.microsoft.com/office/drawing/2014/main" id="{B9F495E5-AAFF-948B-9D32-1D41350DCEBF}"/>
+              </a:ext>
+            </a:extLst>
+          </p:cNvPr>
+          <p:cNvPicPr>
+            <a:picLocks noChangeAspect="1"/>
+          </p:cNvPicPr>
+          <p:nvPr/>
+        </p:nvPicPr>
+        <p:blipFill>
+          <a:blip r:embed="rId2"/>
+          <a:stretch>
+            <a:fillRect/>
+          </a:stretch>
+        </p:blipFill>
+        <p:spPr>
+          <a:xfrm>
+            <a:off x="1152818" y="2365375"/>
+            <a:ext cx="9239250" cy="3990975"/>
+          </a:xfrm>
+          <a:prstGeom prst="rect">
+            <a:avLst/>
+          </a:prstGeom>
+        </p:spPr>
+      </p:pic>
+    </p:spTree>
+    <p:extLst>
+      <p:ext uri="{BB962C8B-B14F-4D97-AF65-F5344CB8AC3E}">
+        <p14:creationId xmlns:p14="http://schemas.microsoft.com/office/powerpoint/2010/main" val="2672963742"/>
+      </p:ext>
+    </p:extLst>
+  </p:cSld>
+  <p:clrMapOvr>
+    <a:masterClrMapping/>
+  </p:clrMapOvr>
+</p:sld>
+</file>
+
+<file path=ppt/slides/slide13.xml><?xml version="1.0" encoding="utf-8"?>
+<p:sld xmlns:a="http://schemas.openxmlformats.org/drawingml/2006/main" xmlns:r="http://schemas.openxmlformats.org/officeDocument/2006/relationships" xmlns:p="http://schemas.openxmlformats.org/presentationml/2006/main">
+  <p:cSld>
+    <p:spTree>
+      <p:nvGrpSpPr>
+        <p:cNvPr id="1" name=""/>
+        <p:cNvGrpSpPr/>
+        <p:nvPr/>
+      </p:nvGrpSpPr>
+      <p:grpSpPr>
+        <a:xfrm>
+          <a:off x="0" y="0"/>
+          <a:ext cx="0" cy="0"/>
+          <a:chOff x="0" y="0"/>
+          <a:chExt cx="0" cy="0"/>
+        </a:xfrm>
+      </p:grpSpPr>
+      <p:sp>
+        <p:nvSpPr>
+          <p:cNvPr id="2" name="Titolo 1">
+            <a:extLst>
+              <a:ext uri="{FF2B5EF4-FFF2-40B4-BE49-F238E27FC236}">
+                <a16:creationId xmlns:a16="http://schemas.microsoft.com/office/drawing/2014/main" id="{603A5762-7F8C-6376-2AF4-2338831D87D1}"/>
+              </a:ext>
+            </a:extLst>
+          </p:cNvPr>
+          <p:cNvSpPr>
+            <a:spLocks noGrp="1"/>
+          </p:cNvSpPr>
+          <p:nvPr>
+            <p:ph type="title"/>
+          </p:nvPr>
+        </p:nvSpPr>
+        <p:spPr/>
+        <p:txBody>
+          <a:bodyPr/>
+          <a:lstStyle/>
+          <a:p>
+            <a:r>
+              <a:rPr lang="it-IT" dirty="0"/>
+              <a:t>Primo Feedback</a:t>
+            </a:r>
+          </a:p>
+        </p:txBody>
+      </p:sp>
+      <p:sp>
+        <p:nvSpPr>
+          <p:cNvPr id="3" name="Segnaposto numero diapositiva 2">
+            <a:extLst>
+              <a:ext uri="{FF2B5EF4-FFF2-40B4-BE49-F238E27FC236}">
+                <a16:creationId xmlns:a16="http://schemas.microsoft.com/office/drawing/2014/main" id="{0D023E5B-AB58-D6DD-9870-5FB5BE85F247}"/>
+              </a:ext>
+            </a:extLst>
+          </p:cNvPr>
+          <p:cNvSpPr>
+            <a:spLocks noGrp="1"/>
+          </p:cNvSpPr>
+          <p:nvPr>
+            <p:ph type="sldNum" sz="quarter" idx="12"/>
+          </p:nvPr>
+        </p:nvSpPr>
+        <p:spPr/>
+        <p:txBody>
+          <a:bodyPr/>
+          <a:lstStyle/>
+          <a:p>
+            <a:fld id="{D52F2E17-486B-469A-8A18-48E5804D6F3A}" type="slidenum">
+              <a:rPr lang="it-IT" smtClean="0"/>
+              <a:t>13</a:t>
+            </a:fld>
+            <a:endParaRPr lang="it-IT"/>
+          </a:p>
+        </p:txBody>
+      </p:sp>
+      <p:sp>
+        <p:nvSpPr>
+          <p:cNvPr id="5" name="CasellaDiTesto 4">
+            <a:extLst>
+              <a:ext uri="{FF2B5EF4-FFF2-40B4-BE49-F238E27FC236}">
+                <a16:creationId xmlns:a16="http://schemas.microsoft.com/office/drawing/2014/main" id="{A8A01F9E-F570-9F8F-F146-2871CAFD5978}"/>
+              </a:ext>
+            </a:extLst>
+          </p:cNvPr>
+          <p:cNvSpPr txBox="1"/>
+          <p:nvPr/>
+        </p:nvSpPr>
+        <p:spPr>
+          <a:xfrm>
+            <a:off x="984739" y="1814732"/>
+            <a:ext cx="9917723" cy="2585323"/>
+          </a:xfrm>
+          <a:prstGeom prst="rect">
+            <a:avLst/>
+          </a:prstGeom>
+          <a:noFill/>
+        </p:spPr>
+        <p:txBody>
+          <a:bodyPr wrap="square" rtlCol="0">
+            <a:spAutoFit/>
+          </a:bodyPr>
+          <a:lstStyle/>
+          <a:p>
+            <a:pPr marL="285750" indent="-285750">
+              <a:buFont typeface="Wingdings" panose="05000000000000000000" pitchFamily="2" charset="2"/>
+              <a:buChar char="Ø"/>
+            </a:pPr>
+            <a:r>
+              <a:rPr lang="it-IT" dirty="0"/>
+              <a:t>Sembra che la rete ora sia una retta con un solo input (la portata) addestrata sui 9 punti di un solo dispositivo, quindi non può generalizzare ad altri sensori e l'errore non è lineare. Se cosi è, </a:t>
+            </a:r>
+          </a:p>
+          <a:p>
+            <a:pPr marL="742950" lvl="1" indent="-285750">
+              <a:buFont typeface="Wingdings" panose="05000000000000000000" pitchFamily="2" charset="2"/>
+              <a:buChar char="q"/>
+            </a:pPr>
+            <a:r>
+              <a:rPr lang="it-IT" dirty="0"/>
+              <a:t>Si suggerisce di usare come input gli errori misurati nei punti veloci (max, 0.7·max, 0.4·max) e come output quelli dei punti lenti (10·min, 5·min, 3·min, min), che sono quelli che costano più tempo. </a:t>
+            </a:r>
+          </a:p>
+          <a:p>
+            <a:pPr marL="742950" lvl="1" indent="-285750">
+              <a:buFont typeface="Wingdings" panose="05000000000000000000" pitchFamily="2" charset="2"/>
+              <a:buChar char="Ø"/>
+            </a:pPr>
+            <a:endParaRPr lang="it-IT" dirty="0"/>
+          </a:p>
+          <a:p>
+            <a:pPr marL="285750" indent="-285750">
+              <a:buFont typeface="Wingdings" panose="05000000000000000000" pitchFamily="2" charset="2"/>
+              <a:buChar char="Ø"/>
+            </a:pPr>
+            <a:r>
+              <a:rPr lang="it-IT" dirty="0"/>
+              <a:t>Serve poi una divisione </a:t>
+            </a:r>
+            <a:r>
+              <a:rPr lang="it-IT" dirty="0" err="1"/>
+              <a:t>train</a:t>
+            </a:r>
+            <a:r>
+              <a:rPr lang="it-IT" dirty="0"/>
+              <a:t>/test per dispositivo </a:t>
+            </a:r>
+          </a:p>
+          <a:p>
+            <a:pPr marL="285750" indent="-285750">
+              <a:buFont typeface="Wingdings" panose="05000000000000000000" pitchFamily="2" charset="2"/>
+              <a:buChar char="Ø"/>
+            </a:pPr>
+            <a:endParaRPr lang="it-IT" dirty="0"/>
+          </a:p>
+          <a:p>
+            <a:pPr marL="285750" indent="-285750">
+              <a:buFont typeface="Wingdings" panose="05000000000000000000" pitchFamily="2" charset="2"/>
+              <a:buChar char="Ø"/>
+            </a:pPr>
+            <a:r>
+              <a:rPr lang="it-IT" dirty="0"/>
+              <a:t>e un confronto con un baseline semplice, come una regressione lineare multipla.</a:t>
+            </a:r>
+          </a:p>
+        </p:txBody>
+      </p:sp>
+    </p:spTree>
+    <p:extLst>
+      <p:ext uri="{BB962C8B-B14F-4D97-AF65-F5344CB8AC3E}">
+        <p14:creationId xmlns:p14="http://schemas.microsoft.com/office/powerpoint/2010/main" val="1050283076"/>
+      </p:ext>
+    </p:extLst>
+  </p:cSld>
+  <p:clrMapOvr>
+    <a:masterClrMapping/>
+  </p:clrMapOvr>
+</p:sld>
+</file>
+
+<file path=ppt/slides/slide14.xml><?xml version="1.0" encoding="utf-8"?>
+<p:sld xmlns:a="http://schemas.openxmlformats.org/drawingml/2006/main" xmlns:r="http://schemas.openxmlformats.org/officeDocument/2006/relationships" xmlns:p="http://schemas.openxmlformats.org/presentationml/2006/main">
+  <p:cSld>
+    <p:spTree>
+      <p:nvGrpSpPr>
+        <p:cNvPr id="1" name=""/>
+        <p:cNvGrpSpPr/>
+        <p:nvPr/>
+      </p:nvGrpSpPr>
+      <p:grpSpPr>
+        <a:xfrm>
+          <a:off x="0" y="0"/>
+          <a:ext cx="0" cy="0"/>
+          <a:chOff x="0" y="0"/>
+          <a:chExt cx="0" cy="0"/>
+        </a:xfrm>
+      </p:grpSpPr>
+      <p:sp>
+        <p:nvSpPr>
+          <p:cNvPr id="2" name="Titolo 1">
+            <a:extLst>
+              <a:ext uri="{FF2B5EF4-FFF2-40B4-BE49-F238E27FC236}">
                 <a16:creationId xmlns:a16="http://schemas.microsoft.com/office/drawing/2014/main" id="{8FD27ADA-7992-E951-182B-54254A18A76E}"/>
               </a:ext>
             </a:extLst>
@@ -3861,7 +4436,7 @@
           <a:p>
             <a:fld id="{D52F2E17-486B-469A-8A18-48E5804D6F3A}" type="slidenum">
               <a:rPr lang="it-IT" smtClean="0"/>
-              <a:t>10</a:t>
+              <a:t>14</a:t>
             </a:fld>
             <a:endParaRPr lang="it-IT"/>
           </a:p>
@@ -12561,7 +13136,7 @@
           <p:cNvPr id="2" name="Titolo 1">
             <a:extLst>
               <a:ext uri="{FF2B5EF4-FFF2-40B4-BE49-F238E27FC236}">
-                <a16:creationId xmlns:a16="http://schemas.microsoft.com/office/drawing/2014/main" id="{603A5762-7F8C-6376-2AF4-2338831D87D1}"/>
+                <a16:creationId xmlns:a16="http://schemas.microsoft.com/office/drawing/2014/main" id="{532ADAD3-7176-4177-49B4-A4CBF3552B3C}"/>
               </a:ext>
             </a:extLst>
           </p:cNvPr>
@@ -12578,8 +13153,20 @@
           <a:lstStyle/>
           <a:p>
             <a:r>
+              <a:rPr lang="it-IT" dirty="0" err="1"/>
+              <a:t>Result</a:t>
+            </a:r>
+            <a:r>
               <a:rPr lang="it-IT" dirty="0"/>
-              <a:t>Primo Feedback</a:t>
+              <a:t> </a:t>
+            </a:r>
+            <a:r>
+              <a:rPr lang="it-IT" dirty="0" err="1"/>
+              <a:t>Before</a:t>
+            </a:r>
+            <a:r>
+              <a:rPr lang="it-IT" dirty="0"/>
+              <a:t> Training</a:t>
             </a:r>
           </a:p>
         </p:txBody>
@@ -12589,7 +13176,7 @@
           <p:cNvPr id="3" name="Segnaposto numero diapositiva 2">
             <a:extLst>
               <a:ext uri="{FF2B5EF4-FFF2-40B4-BE49-F238E27FC236}">
-                <a16:creationId xmlns:a16="http://schemas.microsoft.com/office/drawing/2014/main" id="{0D023E5B-AB58-D6DD-9870-5FB5BE85F247}"/>
+                <a16:creationId xmlns:a16="http://schemas.microsoft.com/office/drawing/2014/main" id="{EAF5BAA0-C7A8-1634-7941-1833FBFE1480}"/>
               </a:ext>
             </a:extLst>
           </p:cNvPr>
@@ -12613,101 +13200,40 @@
           </a:p>
         </p:txBody>
       </p:sp>
-      <p:sp>
-        <p:nvSpPr>
-          <p:cNvPr id="5" name="CasellaDiTesto 4">
+      <p:pic>
+        <p:nvPicPr>
+          <p:cNvPr id="5" name="Immagine 4">
             <a:extLst>
               <a:ext uri="{FF2B5EF4-FFF2-40B4-BE49-F238E27FC236}">
-                <a16:creationId xmlns:a16="http://schemas.microsoft.com/office/drawing/2014/main" id="{A8A01F9E-F570-9F8F-F146-2871CAFD5978}"/>
+                <a16:creationId xmlns:a16="http://schemas.microsoft.com/office/drawing/2014/main" id="{DD13270C-E64F-2F44-8286-4C5EDDDFE979}"/>
               </a:ext>
             </a:extLst>
           </p:cNvPr>
-          <p:cNvSpPr txBox="1"/>
+          <p:cNvPicPr>
+            <a:picLocks noChangeAspect="1"/>
+          </p:cNvPicPr>
           <p:nvPr/>
-        </p:nvSpPr>
+        </p:nvPicPr>
+        <p:blipFill>
+          <a:blip r:embed="rId2"/>
+          <a:stretch>
+            <a:fillRect/>
+          </a:stretch>
+        </p:blipFill>
         <p:spPr>
           <a:xfrm>
-            <a:off x="984739" y="1814732"/>
-            <a:ext cx="9917723" cy="2585323"/>
+            <a:off x="1407355" y="1690688"/>
+            <a:ext cx="7048500" cy="5038725"/>
           </a:xfrm>
           <a:prstGeom prst="rect">
             <a:avLst/>
           </a:prstGeom>
-          <a:noFill/>
         </p:spPr>
-        <p:txBody>
-          <a:bodyPr wrap="square" rtlCol="0">
-            <a:spAutoFit/>
-          </a:bodyPr>
-          <a:lstStyle/>
-          <a:p>
-            <a:pPr marL="285750" indent="-285750">
-              <a:buFont typeface="Wingdings" panose="05000000000000000000" pitchFamily="2" charset="2"/>
-              <a:buChar char="Ø"/>
-            </a:pPr>
-            <a:r>
-              <a:rPr lang="it-IT" dirty="0"/>
-              <a:t>Sembra che la rete ora sia una retta con un solo input (la portata) addestrata sui 9 punti di un solo dispositivo, quindi non può generalizzare ad altri sensori e l'errore non è lineare. Se cosi è, </a:t>
-            </a:r>
-          </a:p>
-          <a:p>
-            <a:pPr marL="742950" lvl="1" indent="-285750">
-              <a:buFont typeface="Wingdings" panose="05000000000000000000" pitchFamily="2" charset="2"/>
-              <a:buChar char="q"/>
-            </a:pPr>
-            <a:r>
-              <a:rPr lang="it-IT" dirty="0"/>
-              <a:t>Si suggerisce di usare come input gli errori misurati nei punti veloci (max, 0.7·max, 0.4·max) e come output quelli dei punti lenti (10·min, 5·min, 3·min, min), che sono quelli che costano più tempo. </a:t>
-            </a:r>
-          </a:p>
-          <a:p>
-            <a:pPr marL="742950" lvl="1" indent="-285750">
-              <a:buFont typeface="Wingdings" panose="05000000000000000000" pitchFamily="2" charset="2"/>
-              <a:buChar char="Ø"/>
-            </a:pPr>
-            <a:endParaRPr lang="it-IT" dirty="0"/>
-          </a:p>
-          <a:p>
-            <a:pPr marL="285750" indent="-285750">
-              <a:buFont typeface="Wingdings" panose="05000000000000000000" pitchFamily="2" charset="2"/>
-              <a:buChar char="Ø"/>
-            </a:pPr>
-            <a:r>
-              <a:rPr lang="it-IT" dirty="0"/>
-              <a:t>Serve poi una divisione </a:t>
-            </a:r>
-            <a:r>
-              <a:rPr lang="it-IT" dirty="0" err="1"/>
-              <a:t>train</a:t>
-            </a:r>
-            <a:r>
-              <a:rPr lang="it-IT" dirty="0"/>
-              <a:t>/test per dispositivo </a:t>
-            </a:r>
-          </a:p>
-          <a:p>
-            <a:pPr marL="285750" indent="-285750">
-              <a:buFont typeface="Wingdings" panose="05000000000000000000" pitchFamily="2" charset="2"/>
-              <a:buChar char="Ø"/>
-            </a:pPr>
-            <a:endParaRPr lang="it-IT" dirty="0"/>
-          </a:p>
-          <a:p>
-            <a:pPr marL="285750" indent="-285750">
-              <a:buFont typeface="Wingdings" panose="05000000000000000000" pitchFamily="2" charset="2"/>
-              <a:buChar char="Ø"/>
-            </a:pPr>
-            <a:r>
-              <a:rPr lang="it-IT" dirty="0"/>
-              <a:t>e un confronto con un baseline semplice, come una regressione lineare multipla.</a:t>
-            </a:r>
-          </a:p>
-        </p:txBody>
-      </p:sp>
+      </p:pic>
     </p:spTree>
     <p:extLst>
       <p:ext uri="{BB962C8B-B14F-4D97-AF65-F5344CB8AC3E}">
-        <p14:creationId xmlns:p14="http://schemas.microsoft.com/office/powerpoint/2010/main" val="1050283076"/>
+        <p14:creationId xmlns:p14="http://schemas.microsoft.com/office/powerpoint/2010/main" val="3521077887"/>
       </p:ext>
     </p:extLst>
   </p:cSld>
